--- a/skills/ppt-creator/templates/institutional_deck.pptx
+++ b/skills/ppt-creator/templates/institutional_deck.pptx
@@ -3110,14 +3110,100 @@
       <p:grpSpPr/>
       <p:sp>
         <p:nvSpPr>
-          <p:cNvPr id="2" name="TextBox 1"/>
+          <p:cNvPr id="2" name="Rectangle 1"/>
+          <p:cNvSpPr/>
+          <p:nvPr/>
+        </p:nvSpPr>
+        <p:spPr>
+          <a:xfrm>
+            <a:off x="0" y="0"/>
+            <a:ext cx="457200" cy="6858000"/>
+          </a:xfrm>
+          <a:prstGeom prst="rect">
+            <a:avLst/>
+          </a:prstGeom>
+          <a:solidFill>
+            <a:srgbClr val="002B5C"/>
+          </a:solidFill>
+          <a:ln>
+            <a:noFill/>
+          </a:ln>
+        </p:spPr>
+        <p:style>
+          <a:lnRef idx="1">
+            <a:schemeClr val="accent1"/>
+          </a:lnRef>
+          <a:fillRef idx="3">
+            <a:schemeClr val="accent1"/>
+          </a:fillRef>
+          <a:effectRef idx="2">
+            <a:schemeClr val="accent1"/>
+          </a:effectRef>
+          <a:fontRef idx="minor">
+            <a:schemeClr val="lt1"/>
+          </a:fontRef>
+        </p:style>
+        <p:txBody>
+          <a:bodyPr rtlCol="0" anchor="ctr"/>
+          <a:lstStyle/>
+          <a:p>
+            <a:pPr algn="ctr"/>
+          </a:p>
+        </p:txBody>
+      </p:sp>
+      <p:sp>
+        <p:nvSpPr>
+          <p:cNvPr id="3" name="Rectangle 2"/>
+          <p:cNvSpPr/>
+          <p:nvPr/>
+        </p:nvSpPr>
+        <p:spPr>
+          <a:xfrm>
+            <a:off x="457200" y="3200400"/>
+            <a:ext cx="4572000" cy="45720"/>
+          </a:xfrm>
+          <a:prstGeom prst="rect">
+            <a:avLst/>
+          </a:prstGeom>
+          <a:solidFill>
+            <a:srgbClr val="007EE5"/>
+          </a:solidFill>
+          <a:ln>
+            <a:noFill/>
+          </a:ln>
+        </p:spPr>
+        <p:style>
+          <a:lnRef idx="1">
+            <a:schemeClr val="accent1"/>
+          </a:lnRef>
+          <a:fillRef idx="3">
+            <a:schemeClr val="accent1"/>
+          </a:fillRef>
+          <a:effectRef idx="2">
+            <a:schemeClr val="accent1"/>
+          </a:effectRef>
+          <a:fontRef idx="minor">
+            <a:schemeClr val="lt1"/>
+          </a:fontRef>
+        </p:style>
+        <p:txBody>
+          <a:bodyPr rtlCol="0" anchor="ctr"/>
+          <a:lstStyle/>
+          <a:p>
+            <a:pPr algn="ctr"/>
+          </a:p>
+        </p:txBody>
+      </p:sp>
+      <p:sp>
+        <p:nvSpPr>
+          <p:cNvPr id="4" name="TextBox 3"/>
           <p:cNvSpPr txBox="1"/>
           <p:nvPr/>
         </p:nvSpPr>
         <p:spPr>
           <a:xfrm>
-            <a:off x="457200" y="365760"/>
-            <a:ext cx="11247120" cy="822960"/>
+            <a:off x="1097280" y="1828800"/>
+            <a:ext cx="8229600" cy="1371600"/>
           </a:xfrm>
           <a:prstGeom prst="rect">
             <a:avLst/>
@@ -3125,18 +3211,65 @@
           <a:noFill/>
         </p:spPr>
         <p:txBody>
-          <a:bodyPr wrap="none">
-            <a:spAutoFit/>
-          </a:bodyPr>
-          <a:lstStyle/>
-          <a:p>
-            <a:r>
-              <a:rPr sz="2400" b="1">
+          <a:bodyPr wrap="square"/>
+          <a:lstStyle/>
+          <a:p>
+            <a:pPr algn="l">
+              <a:spcBef>
+                <a:spcPts val="0"/>
+              </a:spcBef>
+              <a:spcAft>
+                <a:spcPts val="0"/>
+              </a:spcAft>
+            </a:pPr>
+            <a:r>
+              <a:rPr sz="3600" b="1">
                 <a:solidFill>
-                  <a:srgbClr val="0B3D91"/>
+                  <a:srgbClr val="1A1A1A"/>
                 </a:solidFill>
+                <a:latin typeface="Calibri"/>
               </a:rPr>
-              <a:t>[1/22] Title</a:t>
+              <a:t>[institutional_deck]</a:t>
+            </a:r>
+          </a:p>
+        </p:txBody>
+      </p:sp>
+      <p:sp>
+        <p:nvSpPr>
+          <p:cNvPr id="5" name="TextBox 4"/>
+          <p:cNvSpPr txBox="1"/>
+          <p:nvPr/>
+        </p:nvSpPr>
+        <p:spPr>
+          <a:xfrm>
+            <a:off x="1097280" y="3474720"/>
+            <a:ext cx="8229600" cy="731520"/>
+          </a:xfrm>
+          <a:prstGeom prst="rect">
+            <a:avLst/>
+          </a:prstGeom>
+          <a:noFill/>
+        </p:spPr>
+        <p:txBody>
+          <a:bodyPr wrap="square"/>
+          <a:lstStyle/>
+          <a:p>
+            <a:pPr algn="l">
+              <a:spcBef>
+                <a:spcPts val="0"/>
+              </a:spcBef>
+              <a:spcAft>
+                <a:spcPts val="0"/>
+              </a:spcAft>
+            </a:pPr>
+            <a:r>
+              <a:rPr sz="1800" b="0">
+                <a:solidFill>
+                  <a:srgbClr val="6B7280"/>
+                </a:solidFill>
+                <a:latin typeface="Calibri"/>
+              </a:rPr>
+              <a:t>Template — 22 slides</a:t>
             </a:r>
           </a:p>
         </p:txBody>
@@ -3161,14 +3294,100 @@
       <p:grpSpPr/>
       <p:sp>
         <p:nvSpPr>
-          <p:cNvPr id="2" name="TextBox 1"/>
+          <p:cNvPr id="2" name="Rectangle 1"/>
+          <p:cNvSpPr/>
+          <p:nvPr/>
+        </p:nvSpPr>
+        <p:spPr>
+          <a:xfrm>
+            <a:off x="0" y="0"/>
+            <a:ext cx="12191695" cy="6858000"/>
+          </a:xfrm>
+          <a:prstGeom prst="rect">
+            <a:avLst/>
+          </a:prstGeom>
+          <a:solidFill>
+            <a:srgbClr val="002B5C"/>
+          </a:solidFill>
+          <a:ln>
+            <a:noFill/>
+          </a:ln>
+        </p:spPr>
+        <p:style>
+          <a:lnRef idx="1">
+            <a:schemeClr val="accent1"/>
+          </a:lnRef>
+          <a:fillRef idx="3">
+            <a:schemeClr val="accent1"/>
+          </a:fillRef>
+          <a:effectRef idx="2">
+            <a:schemeClr val="accent1"/>
+          </a:effectRef>
+          <a:fontRef idx="minor">
+            <a:schemeClr val="lt1"/>
+          </a:fontRef>
+        </p:style>
+        <p:txBody>
+          <a:bodyPr rtlCol="0" anchor="ctr"/>
+          <a:lstStyle/>
+          <a:p>
+            <a:pPr algn="ctr"/>
+          </a:p>
+        </p:txBody>
+      </p:sp>
+      <p:sp>
+        <p:nvSpPr>
+          <p:cNvPr id="3" name="Rectangle 2"/>
+          <p:cNvSpPr/>
+          <p:nvPr/>
+        </p:nvSpPr>
+        <p:spPr>
+          <a:xfrm>
+            <a:off x="1371600" y="3840480"/>
+            <a:ext cx="2743200" cy="45720"/>
+          </a:xfrm>
+          <a:prstGeom prst="rect">
+            <a:avLst/>
+          </a:prstGeom>
+          <a:solidFill>
+            <a:srgbClr val="007EE5"/>
+          </a:solidFill>
+          <a:ln>
+            <a:noFill/>
+          </a:ln>
+        </p:spPr>
+        <p:style>
+          <a:lnRef idx="1">
+            <a:schemeClr val="accent1"/>
+          </a:lnRef>
+          <a:fillRef idx="3">
+            <a:schemeClr val="accent1"/>
+          </a:fillRef>
+          <a:effectRef idx="2">
+            <a:schemeClr val="accent1"/>
+          </a:effectRef>
+          <a:fontRef idx="minor">
+            <a:schemeClr val="lt1"/>
+          </a:fontRef>
+        </p:style>
+        <p:txBody>
+          <a:bodyPr rtlCol="0" anchor="ctr"/>
+          <a:lstStyle/>
+          <a:p>
+            <a:pPr algn="ctr"/>
+          </a:p>
+        </p:txBody>
+      </p:sp>
+      <p:sp>
+        <p:nvSpPr>
+          <p:cNvPr id="4" name="TextBox 3"/>
           <p:cNvSpPr txBox="1"/>
           <p:nvPr/>
         </p:nvSpPr>
         <p:spPr>
           <a:xfrm>
-            <a:off x="457200" y="365760"/>
-            <a:ext cx="11247120" cy="822960"/>
+            <a:off x="1371600" y="2286000"/>
+            <a:ext cx="9144000" cy="1371600"/>
           </a:xfrm>
           <a:prstGeom prst="rect">
             <a:avLst/>
@@ -3176,18 +3395,25 @@
           <a:noFill/>
         </p:spPr>
         <p:txBody>
-          <a:bodyPr wrap="none">
-            <a:spAutoFit/>
-          </a:bodyPr>
-          <a:lstStyle/>
-          <a:p>
-            <a:r>
-              <a:rPr sz="2400" b="1">
+          <a:bodyPr wrap="square"/>
+          <a:lstStyle/>
+          <a:p>
+            <a:pPr algn="l">
+              <a:spcBef>
+                <a:spcPts val="0"/>
+              </a:spcBef>
+              <a:spcAft>
+                <a:spcPts val="0"/>
+              </a:spcAft>
+            </a:pPr>
+            <a:r>
+              <a:rPr sz="3200" b="1">
                 <a:solidFill>
-                  <a:srgbClr val="0B3D91"/>
+                  <a:srgbClr val="FFFFFF"/>
                 </a:solidFill>
+                <a:latin typeface="Calibri"/>
               </a:rPr>
-              <a:t>[10/22] Section 6</a:t>
+              <a:t>Section 6</a:t>
             </a:r>
           </a:p>
         </p:txBody>
@@ -3212,14 +3438,100 @@
       <p:grpSpPr/>
       <p:sp>
         <p:nvSpPr>
-          <p:cNvPr id="2" name="TextBox 1"/>
+          <p:cNvPr id="2" name="Rectangle 1"/>
+          <p:cNvSpPr/>
+          <p:nvPr/>
+        </p:nvSpPr>
+        <p:spPr>
+          <a:xfrm>
+            <a:off x="0" y="0"/>
+            <a:ext cx="12191695" cy="6858000"/>
+          </a:xfrm>
+          <a:prstGeom prst="rect">
+            <a:avLst/>
+          </a:prstGeom>
+          <a:solidFill>
+            <a:srgbClr val="002B5C"/>
+          </a:solidFill>
+          <a:ln>
+            <a:noFill/>
+          </a:ln>
+        </p:spPr>
+        <p:style>
+          <a:lnRef idx="1">
+            <a:schemeClr val="accent1"/>
+          </a:lnRef>
+          <a:fillRef idx="3">
+            <a:schemeClr val="accent1"/>
+          </a:fillRef>
+          <a:effectRef idx="2">
+            <a:schemeClr val="accent1"/>
+          </a:effectRef>
+          <a:fontRef idx="minor">
+            <a:schemeClr val="lt1"/>
+          </a:fontRef>
+        </p:style>
+        <p:txBody>
+          <a:bodyPr rtlCol="0" anchor="ctr"/>
+          <a:lstStyle/>
+          <a:p>
+            <a:pPr algn="ctr"/>
+          </a:p>
+        </p:txBody>
+      </p:sp>
+      <p:sp>
+        <p:nvSpPr>
+          <p:cNvPr id="3" name="Rectangle 2"/>
+          <p:cNvSpPr/>
+          <p:nvPr/>
+        </p:nvSpPr>
+        <p:spPr>
+          <a:xfrm>
+            <a:off x="1371600" y="3840480"/>
+            <a:ext cx="2743200" cy="45720"/>
+          </a:xfrm>
+          <a:prstGeom prst="rect">
+            <a:avLst/>
+          </a:prstGeom>
+          <a:solidFill>
+            <a:srgbClr val="007EE5"/>
+          </a:solidFill>
+          <a:ln>
+            <a:noFill/>
+          </a:ln>
+        </p:spPr>
+        <p:style>
+          <a:lnRef idx="1">
+            <a:schemeClr val="accent1"/>
+          </a:lnRef>
+          <a:fillRef idx="3">
+            <a:schemeClr val="accent1"/>
+          </a:fillRef>
+          <a:effectRef idx="2">
+            <a:schemeClr val="accent1"/>
+          </a:effectRef>
+          <a:fontRef idx="minor">
+            <a:schemeClr val="lt1"/>
+          </a:fontRef>
+        </p:style>
+        <p:txBody>
+          <a:bodyPr rtlCol="0" anchor="ctr"/>
+          <a:lstStyle/>
+          <a:p>
+            <a:pPr algn="ctr"/>
+          </a:p>
+        </p:txBody>
+      </p:sp>
+      <p:sp>
+        <p:nvSpPr>
+          <p:cNvPr id="4" name="TextBox 3"/>
           <p:cNvSpPr txBox="1"/>
           <p:nvPr/>
         </p:nvSpPr>
         <p:spPr>
           <a:xfrm>
-            <a:off x="457200" y="365760"/>
-            <a:ext cx="11247120" cy="822960"/>
+            <a:off x="1371600" y="2286000"/>
+            <a:ext cx="9144000" cy="1371600"/>
           </a:xfrm>
           <a:prstGeom prst="rect">
             <a:avLst/>
@@ -3227,18 +3539,25 @@
           <a:noFill/>
         </p:spPr>
         <p:txBody>
-          <a:bodyPr wrap="none">
-            <a:spAutoFit/>
-          </a:bodyPr>
-          <a:lstStyle/>
-          <a:p>
-            <a:r>
-              <a:rPr sz="2400" b="1">
+          <a:bodyPr wrap="square"/>
+          <a:lstStyle/>
+          <a:p>
+            <a:pPr algn="l">
+              <a:spcBef>
+                <a:spcPts val="0"/>
+              </a:spcBef>
+              <a:spcAft>
+                <a:spcPts val="0"/>
+              </a:spcAft>
+            </a:pPr>
+            <a:r>
+              <a:rPr sz="3200" b="1">
                 <a:solidFill>
-                  <a:srgbClr val="0B3D91"/>
+                  <a:srgbClr val="FFFFFF"/>
                 </a:solidFill>
+                <a:latin typeface="Calibri"/>
               </a:rPr>
-              <a:t>[11/22] Section 7</a:t>
+              <a:t>Section 7</a:t>
             </a:r>
           </a:p>
         </p:txBody>
@@ -3263,14 +3582,100 @@
       <p:grpSpPr/>
       <p:sp>
         <p:nvSpPr>
-          <p:cNvPr id="2" name="TextBox 1"/>
+          <p:cNvPr id="2" name="Rectangle 1"/>
+          <p:cNvSpPr/>
+          <p:nvPr/>
+        </p:nvSpPr>
+        <p:spPr>
+          <a:xfrm>
+            <a:off x="0" y="0"/>
+            <a:ext cx="12191695" cy="6858000"/>
+          </a:xfrm>
+          <a:prstGeom prst="rect">
+            <a:avLst/>
+          </a:prstGeom>
+          <a:solidFill>
+            <a:srgbClr val="002B5C"/>
+          </a:solidFill>
+          <a:ln>
+            <a:noFill/>
+          </a:ln>
+        </p:spPr>
+        <p:style>
+          <a:lnRef idx="1">
+            <a:schemeClr val="accent1"/>
+          </a:lnRef>
+          <a:fillRef idx="3">
+            <a:schemeClr val="accent1"/>
+          </a:fillRef>
+          <a:effectRef idx="2">
+            <a:schemeClr val="accent1"/>
+          </a:effectRef>
+          <a:fontRef idx="minor">
+            <a:schemeClr val="lt1"/>
+          </a:fontRef>
+        </p:style>
+        <p:txBody>
+          <a:bodyPr rtlCol="0" anchor="ctr"/>
+          <a:lstStyle/>
+          <a:p>
+            <a:pPr algn="ctr"/>
+          </a:p>
+        </p:txBody>
+      </p:sp>
+      <p:sp>
+        <p:nvSpPr>
+          <p:cNvPr id="3" name="Rectangle 2"/>
+          <p:cNvSpPr/>
+          <p:nvPr/>
+        </p:nvSpPr>
+        <p:spPr>
+          <a:xfrm>
+            <a:off x="1371600" y="3840480"/>
+            <a:ext cx="2743200" cy="45720"/>
+          </a:xfrm>
+          <a:prstGeom prst="rect">
+            <a:avLst/>
+          </a:prstGeom>
+          <a:solidFill>
+            <a:srgbClr val="007EE5"/>
+          </a:solidFill>
+          <a:ln>
+            <a:noFill/>
+          </a:ln>
+        </p:spPr>
+        <p:style>
+          <a:lnRef idx="1">
+            <a:schemeClr val="accent1"/>
+          </a:lnRef>
+          <a:fillRef idx="3">
+            <a:schemeClr val="accent1"/>
+          </a:fillRef>
+          <a:effectRef idx="2">
+            <a:schemeClr val="accent1"/>
+          </a:effectRef>
+          <a:fontRef idx="minor">
+            <a:schemeClr val="lt1"/>
+          </a:fontRef>
+        </p:style>
+        <p:txBody>
+          <a:bodyPr rtlCol="0" anchor="ctr"/>
+          <a:lstStyle/>
+          <a:p>
+            <a:pPr algn="ctr"/>
+          </a:p>
+        </p:txBody>
+      </p:sp>
+      <p:sp>
+        <p:nvSpPr>
+          <p:cNvPr id="4" name="TextBox 3"/>
           <p:cNvSpPr txBox="1"/>
           <p:nvPr/>
         </p:nvSpPr>
         <p:spPr>
           <a:xfrm>
-            <a:off x="457200" y="365760"/>
-            <a:ext cx="11247120" cy="822960"/>
+            <a:off x="1371600" y="2286000"/>
+            <a:ext cx="9144000" cy="1371600"/>
           </a:xfrm>
           <a:prstGeom prst="rect">
             <a:avLst/>
@@ -3278,18 +3683,25 @@
           <a:noFill/>
         </p:spPr>
         <p:txBody>
-          <a:bodyPr wrap="none">
-            <a:spAutoFit/>
-          </a:bodyPr>
-          <a:lstStyle/>
-          <a:p>
-            <a:r>
-              <a:rPr sz="2400" b="1">
+          <a:bodyPr wrap="square"/>
+          <a:lstStyle/>
+          <a:p>
+            <a:pPr algn="l">
+              <a:spcBef>
+                <a:spcPts val="0"/>
+              </a:spcBef>
+              <a:spcAft>
+                <a:spcPts val="0"/>
+              </a:spcAft>
+            </a:pPr>
+            <a:r>
+              <a:rPr sz="3200" b="1">
                 <a:solidFill>
-                  <a:srgbClr val="0B3D91"/>
+                  <a:srgbClr val="FFFFFF"/>
                 </a:solidFill>
+                <a:latin typeface="Calibri"/>
               </a:rPr>
-              <a:t>[12/22] Section 8</a:t>
+              <a:t>Section 8</a:t>
             </a:r>
           </a:p>
         </p:txBody>
@@ -3314,14 +3726,100 @@
       <p:grpSpPr/>
       <p:sp>
         <p:nvSpPr>
-          <p:cNvPr id="2" name="TextBox 1"/>
+          <p:cNvPr id="2" name="Rectangle 1"/>
+          <p:cNvSpPr/>
+          <p:nvPr/>
+        </p:nvSpPr>
+        <p:spPr>
+          <a:xfrm>
+            <a:off x="0" y="0"/>
+            <a:ext cx="12191695" cy="6858000"/>
+          </a:xfrm>
+          <a:prstGeom prst="rect">
+            <a:avLst/>
+          </a:prstGeom>
+          <a:solidFill>
+            <a:srgbClr val="002B5C"/>
+          </a:solidFill>
+          <a:ln>
+            <a:noFill/>
+          </a:ln>
+        </p:spPr>
+        <p:style>
+          <a:lnRef idx="1">
+            <a:schemeClr val="accent1"/>
+          </a:lnRef>
+          <a:fillRef idx="3">
+            <a:schemeClr val="accent1"/>
+          </a:fillRef>
+          <a:effectRef idx="2">
+            <a:schemeClr val="accent1"/>
+          </a:effectRef>
+          <a:fontRef idx="minor">
+            <a:schemeClr val="lt1"/>
+          </a:fontRef>
+        </p:style>
+        <p:txBody>
+          <a:bodyPr rtlCol="0" anchor="ctr"/>
+          <a:lstStyle/>
+          <a:p>
+            <a:pPr algn="ctr"/>
+          </a:p>
+        </p:txBody>
+      </p:sp>
+      <p:sp>
+        <p:nvSpPr>
+          <p:cNvPr id="3" name="Rectangle 2"/>
+          <p:cNvSpPr/>
+          <p:nvPr/>
+        </p:nvSpPr>
+        <p:spPr>
+          <a:xfrm>
+            <a:off x="1371600" y="3840480"/>
+            <a:ext cx="2743200" cy="45720"/>
+          </a:xfrm>
+          <a:prstGeom prst="rect">
+            <a:avLst/>
+          </a:prstGeom>
+          <a:solidFill>
+            <a:srgbClr val="007EE5"/>
+          </a:solidFill>
+          <a:ln>
+            <a:noFill/>
+          </a:ln>
+        </p:spPr>
+        <p:style>
+          <a:lnRef idx="1">
+            <a:schemeClr val="accent1"/>
+          </a:lnRef>
+          <a:fillRef idx="3">
+            <a:schemeClr val="accent1"/>
+          </a:fillRef>
+          <a:effectRef idx="2">
+            <a:schemeClr val="accent1"/>
+          </a:effectRef>
+          <a:fontRef idx="minor">
+            <a:schemeClr val="lt1"/>
+          </a:fontRef>
+        </p:style>
+        <p:txBody>
+          <a:bodyPr rtlCol="0" anchor="ctr"/>
+          <a:lstStyle/>
+          <a:p>
+            <a:pPr algn="ctr"/>
+          </a:p>
+        </p:txBody>
+      </p:sp>
+      <p:sp>
+        <p:nvSpPr>
+          <p:cNvPr id="4" name="TextBox 3"/>
           <p:cNvSpPr txBox="1"/>
           <p:nvPr/>
         </p:nvSpPr>
         <p:spPr>
           <a:xfrm>
-            <a:off x="457200" y="365760"/>
-            <a:ext cx="11247120" cy="822960"/>
+            <a:off x="1371600" y="2286000"/>
+            <a:ext cx="9144000" cy="1371600"/>
           </a:xfrm>
           <a:prstGeom prst="rect">
             <a:avLst/>
@@ -3329,18 +3827,25 @@
           <a:noFill/>
         </p:spPr>
         <p:txBody>
-          <a:bodyPr wrap="none">
-            <a:spAutoFit/>
-          </a:bodyPr>
-          <a:lstStyle/>
-          <a:p>
-            <a:r>
-              <a:rPr sz="2400" b="1">
+          <a:bodyPr wrap="square"/>
+          <a:lstStyle/>
+          <a:p>
+            <a:pPr algn="l">
+              <a:spcBef>
+                <a:spcPts val="0"/>
+              </a:spcBef>
+              <a:spcAft>
+                <a:spcPts val="0"/>
+              </a:spcAft>
+            </a:pPr>
+            <a:r>
+              <a:rPr sz="3200" b="1">
                 <a:solidFill>
-                  <a:srgbClr val="0B3D91"/>
+                  <a:srgbClr val="FFFFFF"/>
                 </a:solidFill>
+                <a:latin typeface="Calibri"/>
               </a:rPr>
-              <a:t>[13/22] Section 9</a:t>
+              <a:t>Section 9</a:t>
             </a:r>
           </a:p>
         </p:txBody>
@@ -3365,14 +3870,100 @@
       <p:grpSpPr/>
       <p:sp>
         <p:nvSpPr>
-          <p:cNvPr id="2" name="TextBox 1"/>
+          <p:cNvPr id="2" name="Rectangle 1"/>
+          <p:cNvSpPr/>
+          <p:nvPr/>
+        </p:nvSpPr>
+        <p:spPr>
+          <a:xfrm>
+            <a:off x="0" y="0"/>
+            <a:ext cx="12191695" cy="6858000"/>
+          </a:xfrm>
+          <a:prstGeom prst="rect">
+            <a:avLst/>
+          </a:prstGeom>
+          <a:solidFill>
+            <a:srgbClr val="002B5C"/>
+          </a:solidFill>
+          <a:ln>
+            <a:noFill/>
+          </a:ln>
+        </p:spPr>
+        <p:style>
+          <a:lnRef idx="1">
+            <a:schemeClr val="accent1"/>
+          </a:lnRef>
+          <a:fillRef idx="3">
+            <a:schemeClr val="accent1"/>
+          </a:fillRef>
+          <a:effectRef idx="2">
+            <a:schemeClr val="accent1"/>
+          </a:effectRef>
+          <a:fontRef idx="minor">
+            <a:schemeClr val="lt1"/>
+          </a:fontRef>
+        </p:style>
+        <p:txBody>
+          <a:bodyPr rtlCol="0" anchor="ctr"/>
+          <a:lstStyle/>
+          <a:p>
+            <a:pPr algn="ctr"/>
+          </a:p>
+        </p:txBody>
+      </p:sp>
+      <p:sp>
+        <p:nvSpPr>
+          <p:cNvPr id="3" name="Rectangle 2"/>
+          <p:cNvSpPr/>
+          <p:nvPr/>
+        </p:nvSpPr>
+        <p:spPr>
+          <a:xfrm>
+            <a:off x="1371600" y="3840480"/>
+            <a:ext cx="2743200" cy="45720"/>
+          </a:xfrm>
+          <a:prstGeom prst="rect">
+            <a:avLst/>
+          </a:prstGeom>
+          <a:solidFill>
+            <a:srgbClr val="007EE5"/>
+          </a:solidFill>
+          <a:ln>
+            <a:noFill/>
+          </a:ln>
+        </p:spPr>
+        <p:style>
+          <a:lnRef idx="1">
+            <a:schemeClr val="accent1"/>
+          </a:lnRef>
+          <a:fillRef idx="3">
+            <a:schemeClr val="accent1"/>
+          </a:fillRef>
+          <a:effectRef idx="2">
+            <a:schemeClr val="accent1"/>
+          </a:effectRef>
+          <a:fontRef idx="minor">
+            <a:schemeClr val="lt1"/>
+          </a:fontRef>
+        </p:style>
+        <p:txBody>
+          <a:bodyPr rtlCol="0" anchor="ctr"/>
+          <a:lstStyle/>
+          <a:p>
+            <a:pPr algn="ctr"/>
+          </a:p>
+        </p:txBody>
+      </p:sp>
+      <p:sp>
+        <p:nvSpPr>
+          <p:cNvPr id="4" name="TextBox 3"/>
           <p:cNvSpPr txBox="1"/>
           <p:nvPr/>
         </p:nvSpPr>
         <p:spPr>
           <a:xfrm>
-            <a:off x="457200" y="365760"/>
-            <a:ext cx="11247120" cy="822960"/>
+            <a:off x="1371600" y="2286000"/>
+            <a:ext cx="9144000" cy="1371600"/>
           </a:xfrm>
           <a:prstGeom prst="rect">
             <a:avLst/>
@@ -3380,18 +3971,25 @@
           <a:noFill/>
         </p:spPr>
         <p:txBody>
-          <a:bodyPr wrap="none">
-            <a:spAutoFit/>
-          </a:bodyPr>
-          <a:lstStyle/>
-          <a:p>
-            <a:r>
-              <a:rPr sz="2400" b="1">
+          <a:bodyPr wrap="square"/>
+          <a:lstStyle/>
+          <a:p>
+            <a:pPr algn="l">
+              <a:spcBef>
+                <a:spcPts val="0"/>
+              </a:spcBef>
+              <a:spcAft>
+                <a:spcPts val="0"/>
+              </a:spcAft>
+            </a:pPr>
+            <a:r>
+              <a:rPr sz="3200" b="1">
                 <a:solidFill>
-                  <a:srgbClr val="0B3D91"/>
+                  <a:srgbClr val="FFFFFF"/>
                 </a:solidFill>
+                <a:latin typeface="Calibri"/>
               </a:rPr>
-              <a:t>[14/22] Section 10</a:t>
+              <a:t>Section 10</a:t>
             </a:r>
           </a:p>
         </p:txBody>
@@ -3416,14 +4014,100 @@
       <p:grpSpPr/>
       <p:sp>
         <p:nvSpPr>
-          <p:cNvPr id="2" name="TextBox 1"/>
+          <p:cNvPr id="2" name="Rectangle 1"/>
+          <p:cNvSpPr/>
+          <p:nvPr/>
+        </p:nvSpPr>
+        <p:spPr>
+          <a:xfrm>
+            <a:off x="0" y="0"/>
+            <a:ext cx="12191695" cy="6858000"/>
+          </a:xfrm>
+          <a:prstGeom prst="rect">
+            <a:avLst/>
+          </a:prstGeom>
+          <a:solidFill>
+            <a:srgbClr val="002B5C"/>
+          </a:solidFill>
+          <a:ln>
+            <a:noFill/>
+          </a:ln>
+        </p:spPr>
+        <p:style>
+          <a:lnRef idx="1">
+            <a:schemeClr val="accent1"/>
+          </a:lnRef>
+          <a:fillRef idx="3">
+            <a:schemeClr val="accent1"/>
+          </a:fillRef>
+          <a:effectRef idx="2">
+            <a:schemeClr val="accent1"/>
+          </a:effectRef>
+          <a:fontRef idx="minor">
+            <a:schemeClr val="lt1"/>
+          </a:fontRef>
+        </p:style>
+        <p:txBody>
+          <a:bodyPr rtlCol="0" anchor="ctr"/>
+          <a:lstStyle/>
+          <a:p>
+            <a:pPr algn="ctr"/>
+          </a:p>
+        </p:txBody>
+      </p:sp>
+      <p:sp>
+        <p:nvSpPr>
+          <p:cNvPr id="3" name="Rectangle 2"/>
+          <p:cNvSpPr/>
+          <p:nvPr/>
+        </p:nvSpPr>
+        <p:spPr>
+          <a:xfrm>
+            <a:off x="1371600" y="3840480"/>
+            <a:ext cx="2743200" cy="45720"/>
+          </a:xfrm>
+          <a:prstGeom prst="rect">
+            <a:avLst/>
+          </a:prstGeom>
+          <a:solidFill>
+            <a:srgbClr val="007EE5"/>
+          </a:solidFill>
+          <a:ln>
+            <a:noFill/>
+          </a:ln>
+        </p:spPr>
+        <p:style>
+          <a:lnRef idx="1">
+            <a:schemeClr val="accent1"/>
+          </a:lnRef>
+          <a:fillRef idx="3">
+            <a:schemeClr val="accent1"/>
+          </a:fillRef>
+          <a:effectRef idx="2">
+            <a:schemeClr val="accent1"/>
+          </a:effectRef>
+          <a:fontRef idx="minor">
+            <a:schemeClr val="lt1"/>
+          </a:fontRef>
+        </p:style>
+        <p:txBody>
+          <a:bodyPr rtlCol="0" anchor="ctr"/>
+          <a:lstStyle/>
+          <a:p>
+            <a:pPr algn="ctr"/>
+          </a:p>
+        </p:txBody>
+      </p:sp>
+      <p:sp>
+        <p:nvSpPr>
+          <p:cNvPr id="4" name="TextBox 3"/>
           <p:cNvSpPr txBox="1"/>
           <p:nvPr/>
         </p:nvSpPr>
         <p:spPr>
           <a:xfrm>
-            <a:off x="457200" y="365760"/>
-            <a:ext cx="11247120" cy="822960"/>
+            <a:off x="1371600" y="2286000"/>
+            <a:ext cx="9144000" cy="1371600"/>
           </a:xfrm>
           <a:prstGeom prst="rect">
             <a:avLst/>
@@ -3431,18 +4115,25 @@
           <a:noFill/>
         </p:spPr>
         <p:txBody>
-          <a:bodyPr wrap="none">
-            <a:spAutoFit/>
-          </a:bodyPr>
-          <a:lstStyle/>
-          <a:p>
-            <a:r>
-              <a:rPr sz="2400" b="1">
+          <a:bodyPr wrap="square"/>
+          <a:lstStyle/>
+          <a:p>
+            <a:pPr algn="l">
+              <a:spcBef>
+                <a:spcPts val="0"/>
+              </a:spcBef>
+              <a:spcAft>
+                <a:spcPts val="0"/>
+              </a:spcAft>
+            </a:pPr>
+            <a:r>
+              <a:rPr sz="3200" b="1">
                 <a:solidFill>
-                  <a:srgbClr val="0B3D91"/>
+                  <a:srgbClr val="FFFFFF"/>
                 </a:solidFill>
+                <a:latin typeface="Calibri"/>
               </a:rPr>
-              <a:t>[15/22] Section 11</a:t>
+              <a:t>Section 11</a:t>
             </a:r>
           </a:p>
         </p:txBody>
@@ -3467,14 +4158,100 @@
       <p:grpSpPr/>
       <p:sp>
         <p:nvSpPr>
-          <p:cNvPr id="2" name="TextBox 1"/>
+          <p:cNvPr id="2" name="Rectangle 1"/>
+          <p:cNvSpPr/>
+          <p:nvPr/>
+        </p:nvSpPr>
+        <p:spPr>
+          <a:xfrm>
+            <a:off x="0" y="0"/>
+            <a:ext cx="12191695" cy="6858000"/>
+          </a:xfrm>
+          <a:prstGeom prst="rect">
+            <a:avLst/>
+          </a:prstGeom>
+          <a:solidFill>
+            <a:srgbClr val="002B5C"/>
+          </a:solidFill>
+          <a:ln>
+            <a:noFill/>
+          </a:ln>
+        </p:spPr>
+        <p:style>
+          <a:lnRef idx="1">
+            <a:schemeClr val="accent1"/>
+          </a:lnRef>
+          <a:fillRef idx="3">
+            <a:schemeClr val="accent1"/>
+          </a:fillRef>
+          <a:effectRef idx="2">
+            <a:schemeClr val="accent1"/>
+          </a:effectRef>
+          <a:fontRef idx="minor">
+            <a:schemeClr val="lt1"/>
+          </a:fontRef>
+        </p:style>
+        <p:txBody>
+          <a:bodyPr rtlCol="0" anchor="ctr"/>
+          <a:lstStyle/>
+          <a:p>
+            <a:pPr algn="ctr"/>
+          </a:p>
+        </p:txBody>
+      </p:sp>
+      <p:sp>
+        <p:nvSpPr>
+          <p:cNvPr id="3" name="Rectangle 2"/>
+          <p:cNvSpPr/>
+          <p:nvPr/>
+        </p:nvSpPr>
+        <p:spPr>
+          <a:xfrm>
+            <a:off x="1371600" y="3840480"/>
+            <a:ext cx="2743200" cy="45720"/>
+          </a:xfrm>
+          <a:prstGeom prst="rect">
+            <a:avLst/>
+          </a:prstGeom>
+          <a:solidFill>
+            <a:srgbClr val="007EE5"/>
+          </a:solidFill>
+          <a:ln>
+            <a:noFill/>
+          </a:ln>
+        </p:spPr>
+        <p:style>
+          <a:lnRef idx="1">
+            <a:schemeClr val="accent1"/>
+          </a:lnRef>
+          <a:fillRef idx="3">
+            <a:schemeClr val="accent1"/>
+          </a:fillRef>
+          <a:effectRef idx="2">
+            <a:schemeClr val="accent1"/>
+          </a:effectRef>
+          <a:fontRef idx="minor">
+            <a:schemeClr val="lt1"/>
+          </a:fontRef>
+        </p:style>
+        <p:txBody>
+          <a:bodyPr rtlCol="0" anchor="ctr"/>
+          <a:lstStyle/>
+          <a:p>
+            <a:pPr algn="ctr"/>
+          </a:p>
+        </p:txBody>
+      </p:sp>
+      <p:sp>
+        <p:nvSpPr>
+          <p:cNvPr id="4" name="TextBox 3"/>
           <p:cNvSpPr txBox="1"/>
           <p:nvPr/>
         </p:nvSpPr>
         <p:spPr>
           <a:xfrm>
-            <a:off x="457200" y="365760"/>
-            <a:ext cx="11247120" cy="822960"/>
+            <a:off x="1371600" y="2286000"/>
+            <a:ext cx="9144000" cy="1371600"/>
           </a:xfrm>
           <a:prstGeom prst="rect">
             <a:avLst/>
@@ -3482,18 +4259,25 @@
           <a:noFill/>
         </p:spPr>
         <p:txBody>
-          <a:bodyPr wrap="none">
-            <a:spAutoFit/>
-          </a:bodyPr>
-          <a:lstStyle/>
-          <a:p>
-            <a:r>
-              <a:rPr sz="2400" b="1">
+          <a:bodyPr wrap="square"/>
+          <a:lstStyle/>
+          <a:p>
+            <a:pPr algn="l">
+              <a:spcBef>
+                <a:spcPts val="0"/>
+              </a:spcBef>
+              <a:spcAft>
+                <a:spcPts val="0"/>
+              </a:spcAft>
+            </a:pPr>
+            <a:r>
+              <a:rPr sz="3200" b="1">
                 <a:solidFill>
-                  <a:srgbClr val="0B3D91"/>
+                  <a:srgbClr val="FFFFFF"/>
                 </a:solidFill>
+                <a:latin typeface="Calibri"/>
               </a:rPr>
-              <a:t>[16/22] Section 12</a:t>
+              <a:t>Section 12</a:t>
             </a:r>
           </a:p>
         </p:txBody>
@@ -3518,14 +4302,100 @@
       <p:grpSpPr/>
       <p:sp>
         <p:nvSpPr>
-          <p:cNvPr id="2" name="TextBox 1"/>
+          <p:cNvPr id="2" name="Rectangle 1"/>
+          <p:cNvSpPr/>
+          <p:nvPr/>
+        </p:nvSpPr>
+        <p:spPr>
+          <a:xfrm>
+            <a:off x="0" y="0"/>
+            <a:ext cx="12191695" cy="6858000"/>
+          </a:xfrm>
+          <a:prstGeom prst="rect">
+            <a:avLst/>
+          </a:prstGeom>
+          <a:solidFill>
+            <a:srgbClr val="002B5C"/>
+          </a:solidFill>
+          <a:ln>
+            <a:noFill/>
+          </a:ln>
+        </p:spPr>
+        <p:style>
+          <a:lnRef idx="1">
+            <a:schemeClr val="accent1"/>
+          </a:lnRef>
+          <a:fillRef idx="3">
+            <a:schemeClr val="accent1"/>
+          </a:fillRef>
+          <a:effectRef idx="2">
+            <a:schemeClr val="accent1"/>
+          </a:effectRef>
+          <a:fontRef idx="minor">
+            <a:schemeClr val="lt1"/>
+          </a:fontRef>
+        </p:style>
+        <p:txBody>
+          <a:bodyPr rtlCol="0" anchor="ctr"/>
+          <a:lstStyle/>
+          <a:p>
+            <a:pPr algn="ctr"/>
+          </a:p>
+        </p:txBody>
+      </p:sp>
+      <p:sp>
+        <p:nvSpPr>
+          <p:cNvPr id="3" name="Rectangle 2"/>
+          <p:cNvSpPr/>
+          <p:nvPr/>
+        </p:nvSpPr>
+        <p:spPr>
+          <a:xfrm>
+            <a:off x="1371600" y="3840480"/>
+            <a:ext cx="2743200" cy="45720"/>
+          </a:xfrm>
+          <a:prstGeom prst="rect">
+            <a:avLst/>
+          </a:prstGeom>
+          <a:solidFill>
+            <a:srgbClr val="007EE5"/>
+          </a:solidFill>
+          <a:ln>
+            <a:noFill/>
+          </a:ln>
+        </p:spPr>
+        <p:style>
+          <a:lnRef idx="1">
+            <a:schemeClr val="accent1"/>
+          </a:lnRef>
+          <a:fillRef idx="3">
+            <a:schemeClr val="accent1"/>
+          </a:fillRef>
+          <a:effectRef idx="2">
+            <a:schemeClr val="accent1"/>
+          </a:effectRef>
+          <a:fontRef idx="minor">
+            <a:schemeClr val="lt1"/>
+          </a:fontRef>
+        </p:style>
+        <p:txBody>
+          <a:bodyPr rtlCol="0" anchor="ctr"/>
+          <a:lstStyle/>
+          <a:p>
+            <a:pPr algn="ctr"/>
+          </a:p>
+        </p:txBody>
+      </p:sp>
+      <p:sp>
+        <p:nvSpPr>
+          <p:cNvPr id="4" name="TextBox 3"/>
           <p:cNvSpPr txBox="1"/>
           <p:nvPr/>
         </p:nvSpPr>
         <p:spPr>
           <a:xfrm>
-            <a:off x="457200" y="365760"/>
-            <a:ext cx="11247120" cy="822960"/>
+            <a:off x="1371600" y="2286000"/>
+            <a:ext cx="9144000" cy="1371600"/>
           </a:xfrm>
           <a:prstGeom prst="rect">
             <a:avLst/>
@@ -3533,18 +4403,25 @@
           <a:noFill/>
         </p:spPr>
         <p:txBody>
-          <a:bodyPr wrap="none">
-            <a:spAutoFit/>
-          </a:bodyPr>
-          <a:lstStyle/>
-          <a:p>
-            <a:r>
-              <a:rPr sz="2400" b="1">
+          <a:bodyPr wrap="square"/>
+          <a:lstStyle/>
+          <a:p>
+            <a:pPr algn="l">
+              <a:spcBef>
+                <a:spcPts val="0"/>
+              </a:spcBef>
+              <a:spcAft>
+                <a:spcPts val="0"/>
+              </a:spcAft>
+            </a:pPr>
+            <a:r>
+              <a:rPr sz="3200" b="1">
                 <a:solidFill>
-                  <a:srgbClr val="0B3D91"/>
+                  <a:srgbClr val="FFFFFF"/>
                 </a:solidFill>
+                <a:latin typeface="Calibri"/>
               </a:rPr>
-              <a:t>[17/22] Section 13</a:t>
+              <a:t>Section 13</a:t>
             </a:r>
           </a:p>
         </p:txBody>
@@ -3569,14 +4446,100 @@
       <p:grpSpPr/>
       <p:sp>
         <p:nvSpPr>
-          <p:cNvPr id="2" name="TextBox 1"/>
+          <p:cNvPr id="2" name="Rectangle 1"/>
+          <p:cNvSpPr/>
+          <p:nvPr/>
+        </p:nvSpPr>
+        <p:spPr>
+          <a:xfrm>
+            <a:off x="0" y="0"/>
+            <a:ext cx="12191695" cy="6858000"/>
+          </a:xfrm>
+          <a:prstGeom prst="rect">
+            <a:avLst/>
+          </a:prstGeom>
+          <a:solidFill>
+            <a:srgbClr val="002B5C"/>
+          </a:solidFill>
+          <a:ln>
+            <a:noFill/>
+          </a:ln>
+        </p:spPr>
+        <p:style>
+          <a:lnRef idx="1">
+            <a:schemeClr val="accent1"/>
+          </a:lnRef>
+          <a:fillRef idx="3">
+            <a:schemeClr val="accent1"/>
+          </a:fillRef>
+          <a:effectRef idx="2">
+            <a:schemeClr val="accent1"/>
+          </a:effectRef>
+          <a:fontRef idx="minor">
+            <a:schemeClr val="lt1"/>
+          </a:fontRef>
+        </p:style>
+        <p:txBody>
+          <a:bodyPr rtlCol="0" anchor="ctr"/>
+          <a:lstStyle/>
+          <a:p>
+            <a:pPr algn="ctr"/>
+          </a:p>
+        </p:txBody>
+      </p:sp>
+      <p:sp>
+        <p:nvSpPr>
+          <p:cNvPr id="3" name="Rectangle 2"/>
+          <p:cNvSpPr/>
+          <p:nvPr/>
+        </p:nvSpPr>
+        <p:spPr>
+          <a:xfrm>
+            <a:off x="1371600" y="3840480"/>
+            <a:ext cx="2743200" cy="45720"/>
+          </a:xfrm>
+          <a:prstGeom prst="rect">
+            <a:avLst/>
+          </a:prstGeom>
+          <a:solidFill>
+            <a:srgbClr val="007EE5"/>
+          </a:solidFill>
+          <a:ln>
+            <a:noFill/>
+          </a:ln>
+        </p:spPr>
+        <p:style>
+          <a:lnRef idx="1">
+            <a:schemeClr val="accent1"/>
+          </a:lnRef>
+          <a:fillRef idx="3">
+            <a:schemeClr val="accent1"/>
+          </a:fillRef>
+          <a:effectRef idx="2">
+            <a:schemeClr val="accent1"/>
+          </a:effectRef>
+          <a:fontRef idx="minor">
+            <a:schemeClr val="lt1"/>
+          </a:fontRef>
+        </p:style>
+        <p:txBody>
+          <a:bodyPr rtlCol="0" anchor="ctr"/>
+          <a:lstStyle/>
+          <a:p>
+            <a:pPr algn="ctr"/>
+          </a:p>
+        </p:txBody>
+      </p:sp>
+      <p:sp>
+        <p:nvSpPr>
+          <p:cNvPr id="4" name="TextBox 3"/>
           <p:cNvSpPr txBox="1"/>
           <p:nvPr/>
         </p:nvSpPr>
         <p:spPr>
           <a:xfrm>
-            <a:off x="457200" y="365760"/>
-            <a:ext cx="11247120" cy="822960"/>
+            <a:off x="1371600" y="2286000"/>
+            <a:ext cx="9144000" cy="1371600"/>
           </a:xfrm>
           <a:prstGeom prst="rect">
             <a:avLst/>
@@ -3584,18 +4547,25 @@
           <a:noFill/>
         </p:spPr>
         <p:txBody>
-          <a:bodyPr wrap="none">
-            <a:spAutoFit/>
-          </a:bodyPr>
-          <a:lstStyle/>
-          <a:p>
-            <a:r>
-              <a:rPr sz="2400" b="1">
+          <a:bodyPr wrap="square"/>
+          <a:lstStyle/>
+          <a:p>
+            <a:pPr algn="l">
+              <a:spcBef>
+                <a:spcPts val="0"/>
+              </a:spcBef>
+              <a:spcAft>
+                <a:spcPts val="0"/>
+              </a:spcAft>
+            </a:pPr>
+            <a:r>
+              <a:rPr sz="3200" b="1">
                 <a:solidFill>
-                  <a:srgbClr val="0B3D91"/>
+                  <a:srgbClr val="FFFFFF"/>
                 </a:solidFill>
+                <a:latin typeface="Calibri"/>
               </a:rPr>
-              <a:t>[18/22] Section 14</a:t>
+              <a:t>Section 14</a:t>
             </a:r>
           </a:p>
         </p:txBody>
@@ -3620,14 +4590,143 @@
       <p:grpSpPr/>
       <p:sp>
         <p:nvSpPr>
-          <p:cNvPr id="2" name="TextBox 1"/>
+          <p:cNvPr id="2" name="Rectangle 1"/>
+          <p:cNvSpPr/>
+          <p:nvPr/>
+        </p:nvSpPr>
+        <p:spPr>
+          <a:xfrm>
+            <a:off x="0" y="0"/>
+            <a:ext cx="365760" cy="6858000"/>
+          </a:xfrm>
+          <a:prstGeom prst="rect">
+            <a:avLst/>
+          </a:prstGeom>
+          <a:solidFill>
+            <a:srgbClr val="002B5C"/>
+          </a:solidFill>
+          <a:ln>
+            <a:noFill/>
+          </a:ln>
+        </p:spPr>
+        <p:style>
+          <a:lnRef idx="1">
+            <a:schemeClr val="accent1"/>
+          </a:lnRef>
+          <a:fillRef idx="3">
+            <a:schemeClr val="accent1"/>
+          </a:fillRef>
+          <a:effectRef idx="2">
+            <a:schemeClr val="accent1"/>
+          </a:effectRef>
+          <a:fontRef idx="minor">
+            <a:schemeClr val="lt1"/>
+          </a:fontRef>
+        </p:style>
+        <p:txBody>
+          <a:bodyPr rtlCol="0" anchor="ctr"/>
+          <a:lstStyle/>
+          <a:p>
+            <a:pPr algn="ctr"/>
+          </a:p>
+        </p:txBody>
+      </p:sp>
+      <p:sp>
+        <p:nvSpPr>
+          <p:cNvPr id="3" name="Rectangle 2"/>
+          <p:cNvSpPr/>
+          <p:nvPr/>
+        </p:nvSpPr>
+        <p:spPr>
+          <a:xfrm>
+            <a:off x="365760" y="0"/>
+            <a:ext cx="11825935" cy="36576"/>
+          </a:xfrm>
+          <a:prstGeom prst="rect">
+            <a:avLst/>
+          </a:prstGeom>
+          <a:solidFill>
+            <a:srgbClr val="007EE5"/>
+          </a:solidFill>
+          <a:ln>
+            <a:noFill/>
+          </a:ln>
+        </p:spPr>
+        <p:style>
+          <a:lnRef idx="1">
+            <a:schemeClr val="accent1"/>
+          </a:lnRef>
+          <a:fillRef idx="3">
+            <a:schemeClr val="accent1"/>
+          </a:fillRef>
+          <a:effectRef idx="2">
+            <a:schemeClr val="accent1"/>
+          </a:effectRef>
+          <a:fontRef idx="minor">
+            <a:schemeClr val="lt1"/>
+          </a:fontRef>
+        </p:style>
+        <p:txBody>
+          <a:bodyPr rtlCol="0" anchor="ctr"/>
+          <a:lstStyle/>
+          <a:p>
+            <a:pPr algn="ctr"/>
+          </a:p>
+        </p:txBody>
+      </p:sp>
+      <p:sp>
+        <p:nvSpPr>
+          <p:cNvPr id="4" name="Rectangle 3"/>
+          <p:cNvSpPr/>
+          <p:nvPr/>
+        </p:nvSpPr>
+        <p:spPr>
+          <a:xfrm>
+            <a:off x="365760" y="36576"/>
+            <a:ext cx="11825935" cy="1005840"/>
+          </a:xfrm>
+          <a:prstGeom prst="rect">
+            <a:avLst/>
+          </a:prstGeom>
+          <a:solidFill>
+            <a:srgbClr val="F7F8FA"/>
+          </a:solidFill>
+          <a:ln>
+            <a:noFill/>
+          </a:ln>
+        </p:spPr>
+        <p:style>
+          <a:lnRef idx="1">
+            <a:schemeClr val="accent1"/>
+          </a:lnRef>
+          <a:fillRef idx="3">
+            <a:schemeClr val="accent1"/>
+          </a:fillRef>
+          <a:effectRef idx="2">
+            <a:schemeClr val="accent1"/>
+          </a:effectRef>
+          <a:fontRef idx="minor">
+            <a:schemeClr val="lt1"/>
+          </a:fontRef>
+        </p:style>
+        <p:txBody>
+          <a:bodyPr rtlCol="0" anchor="ctr"/>
+          <a:lstStyle/>
+          <a:p>
+            <a:pPr algn="ctr"/>
+          </a:p>
+        </p:txBody>
+      </p:sp>
+      <p:sp>
+        <p:nvSpPr>
+          <p:cNvPr id="5" name="TextBox 4"/>
           <p:cNvSpPr txBox="1"/>
           <p:nvPr/>
         </p:nvSpPr>
         <p:spPr>
           <a:xfrm>
-            <a:off x="457200" y="365760"/>
-            <a:ext cx="11247120" cy="822960"/>
+            <a:off x="822960" y="164592"/>
+            <a:ext cx="10515600" cy="731520"/>
           </a:xfrm>
           <a:prstGeom prst="rect">
             <a:avLst/>
@@ -3635,18 +4734,191 @@
           <a:noFill/>
         </p:spPr>
         <p:txBody>
-          <a:bodyPr wrap="none">
-            <a:spAutoFit/>
-          </a:bodyPr>
-          <a:lstStyle/>
-          <a:p>
-            <a:r>
-              <a:rPr sz="2400" b="1">
+          <a:bodyPr wrap="square"/>
+          <a:lstStyle/>
+          <a:p>
+            <a:pPr algn="l">
+              <a:spcBef>
+                <a:spcPts val="0"/>
+              </a:spcBef>
+              <a:spcAft>
+                <a:spcPts val="0"/>
+              </a:spcAft>
+            </a:pPr>
+            <a:r>
+              <a:rPr sz="2200" b="1">
                 <a:solidFill>
-                  <a:srgbClr val="0B3D91"/>
+                  <a:srgbClr val="002B5C"/>
                 </a:solidFill>
+                <a:latin typeface="Calibri"/>
               </a:rPr>
               <a:t>[19/22] Recos</a:t>
+            </a:r>
+          </a:p>
+        </p:txBody>
+      </p:sp>
+      <p:sp>
+        <p:nvSpPr>
+          <p:cNvPr id="6" name="Rectangle 5"/>
+          <p:cNvSpPr/>
+          <p:nvPr/>
+        </p:nvSpPr>
+        <p:spPr>
+          <a:xfrm>
+            <a:off x="822960" y="1042415"/>
+            <a:ext cx="10058400" cy="18288"/>
+          </a:xfrm>
+          <a:prstGeom prst="rect">
+            <a:avLst/>
+          </a:prstGeom>
+          <a:solidFill>
+            <a:srgbClr val="007EE5"/>
+          </a:solidFill>
+          <a:ln>
+            <a:noFill/>
+          </a:ln>
+        </p:spPr>
+        <p:style>
+          <a:lnRef idx="1">
+            <a:schemeClr val="accent1"/>
+          </a:lnRef>
+          <a:fillRef idx="3">
+            <a:schemeClr val="accent1"/>
+          </a:fillRef>
+          <a:effectRef idx="2">
+            <a:schemeClr val="accent1"/>
+          </a:effectRef>
+          <a:fontRef idx="minor">
+            <a:schemeClr val="lt1"/>
+          </a:fontRef>
+        </p:style>
+        <p:txBody>
+          <a:bodyPr rtlCol="0" anchor="ctr"/>
+          <a:lstStyle/>
+          <a:p>
+            <a:pPr algn="ctr"/>
+          </a:p>
+        </p:txBody>
+      </p:sp>
+      <p:sp>
+        <p:nvSpPr>
+          <p:cNvPr id="7" name="Rectangle 6"/>
+          <p:cNvSpPr/>
+          <p:nvPr/>
+        </p:nvSpPr>
+        <p:spPr>
+          <a:xfrm>
+            <a:off x="822960" y="6446520"/>
+            <a:ext cx="10515600" cy="9144"/>
+          </a:xfrm>
+          <a:prstGeom prst="rect">
+            <a:avLst/>
+          </a:prstGeom>
+          <a:solidFill>
+            <a:srgbClr val="6B7280"/>
+          </a:solidFill>
+          <a:ln>
+            <a:noFill/>
+          </a:ln>
+        </p:spPr>
+        <p:style>
+          <a:lnRef idx="1">
+            <a:schemeClr val="accent1"/>
+          </a:lnRef>
+          <a:fillRef idx="3">
+            <a:schemeClr val="accent1"/>
+          </a:fillRef>
+          <a:effectRef idx="2">
+            <a:schemeClr val="accent1"/>
+          </a:effectRef>
+          <a:fontRef idx="minor">
+            <a:schemeClr val="lt1"/>
+          </a:fontRef>
+        </p:style>
+        <p:txBody>
+          <a:bodyPr rtlCol="0" anchor="ctr"/>
+          <a:lstStyle/>
+          <a:p>
+            <a:pPr algn="ctr"/>
+          </a:p>
+        </p:txBody>
+      </p:sp>
+      <p:sp>
+        <p:nvSpPr>
+          <p:cNvPr id="8" name="TextBox 7"/>
+          <p:cNvSpPr txBox="1"/>
+          <p:nvPr/>
+        </p:nvSpPr>
+        <p:spPr>
+          <a:xfrm>
+            <a:off x="11155680" y="6492240"/>
+            <a:ext cx="731520" cy="274320"/>
+          </a:xfrm>
+          <a:prstGeom prst="rect">
+            <a:avLst/>
+          </a:prstGeom>
+          <a:noFill/>
+        </p:spPr>
+        <p:txBody>
+          <a:bodyPr wrap="square"/>
+          <a:lstStyle/>
+          <a:p>
+            <a:pPr algn="r">
+              <a:spcBef>
+                <a:spcPts val="0"/>
+              </a:spcBef>
+              <a:spcAft>
+                <a:spcPts val="0"/>
+              </a:spcAft>
+            </a:pPr>
+            <a:r>
+              <a:rPr sz="900" b="0">
+                <a:solidFill>
+                  <a:srgbClr val="6B7280"/>
+                </a:solidFill>
+                <a:latin typeface="Calibri"/>
+              </a:rPr>
+              <a:t>19/22</a:t>
+            </a:r>
+          </a:p>
+        </p:txBody>
+      </p:sp>
+      <p:sp>
+        <p:nvSpPr>
+          <p:cNvPr id="9" name="TextBox 8"/>
+          <p:cNvSpPr txBox="1"/>
+          <p:nvPr/>
+        </p:nvSpPr>
+        <p:spPr>
+          <a:xfrm>
+            <a:off x="822960" y="6492240"/>
+            <a:ext cx="2743200" cy="274320"/>
+          </a:xfrm>
+          <a:prstGeom prst="rect">
+            <a:avLst/>
+          </a:prstGeom>
+          <a:noFill/>
+        </p:spPr>
+        <p:txBody>
+          <a:bodyPr wrap="square"/>
+          <a:lstStyle/>
+          <a:p>
+            <a:pPr algn="l">
+              <a:spcBef>
+                <a:spcPts val="0"/>
+              </a:spcBef>
+              <a:spcAft>
+                <a:spcPts val="0"/>
+              </a:spcAft>
+            </a:pPr>
+            <a:r>
+              <a:rPr sz="800" b="0">
+                <a:solidFill>
+                  <a:srgbClr val="6B7280"/>
+                </a:solidFill>
+                <a:latin typeface="Calibri"/>
+              </a:rPr>
+              <a:t>CONFIDENTIEL</a:t>
             </a:r>
           </a:p>
         </p:txBody>
@@ -3671,14 +4943,100 @@
       <p:grpSpPr/>
       <p:sp>
         <p:nvSpPr>
-          <p:cNvPr id="2" name="TextBox 1"/>
+          <p:cNvPr id="2" name="Rectangle 1"/>
+          <p:cNvSpPr/>
+          <p:nvPr/>
+        </p:nvSpPr>
+        <p:spPr>
+          <a:xfrm>
+            <a:off x="0" y="0"/>
+            <a:ext cx="12191695" cy="6858000"/>
+          </a:xfrm>
+          <a:prstGeom prst="rect">
+            <a:avLst/>
+          </a:prstGeom>
+          <a:solidFill>
+            <a:srgbClr val="002B5C"/>
+          </a:solidFill>
+          <a:ln>
+            <a:noFill/>
+          </a:ln>
+        </p:spPr>
+        <p:style>
+          <a:lnRef idx="1">
+            <a:schemeClr val="accent1"/>
+          </a:lnRef>
+          <a:fillRef idx="3">
+            <a:schemeClr val="accent1"/>
+          </a:fillRef>
+          <a:effectRef idx="2">
+            <a:schemeClr val="accent1"/>
+          </a:effectRef>
+          <a:fontRef idx="minor">
+            <a:schemeClr val="lt1"/>
+          </a:fontRef>
+        </p:style>
+        <p:txBody>
+          <a:bodyPr rtlCol="0" anchor="ctr"/>
+          <a:lstStyle/>
+          <a:p>
+            <a:pPr algn="ctr"/>
+          </a:p>
+        </p:txBody>
+      </p:sp>
+      <p:sp>
+        <p:nvSpPr>
+          <p:cNvPr id="3" name="Rectangle 2"/>
+          <p:cNvSpPr/>
+          <p:nvPr/>
+        </p:nvSpPr>
+        <p:spPr>
+          <a:xfrm>
+            <a:off x="1371600" y="3840480"/>
+            <a:ext cx="2743200" cy="45720"/>
+          </a:xfrm>
+          <a:prstGeom prst="rect">
+            <a:avLst/>
+          </a:prstGeom>
+          <a:solidFill>
+            <a:srgbClr val="007EE5"/>
+          </a:solidFill>
+          <a:ln>
+            <a:noFill/>
+          </a:ln>
+        </p:spPr>
+        <p:style>
+          <a:lnRef idx="1">
+            <a:schemeClr val="accent1"/>
+          </a:lnRef>
+          <a:fillRef idx="3">
+            <a:schemeClr val="accent1"/>
+          </a:fillRef>
+          <a:effectRef idx="2">
+            <a:schemeClr val="accent1"/>
+          </a:effectRef>
+          <a:fontRef idx="minor">
+            <a:schemeClr val="lt1"/>
+          </a:fontRef>
+        </p:style>
+        <p:txBody>
+          <a:bodyPr rtlCol="0" anchor="ctr"/>
+          <a:lstStyle/>
+          <a:p>
+            <a:pPr algn="ctr"/>
+          </a:p>
+        </p:txBody>
+      </p:sp>
+      <p:sp>
+        <p:nvSpPr>
+          <p:cNvPr id="4" name="TextBox 3"/>
           <p:cNvSpPr txBox="1"/>
           <p:nvPr/>
         </p:nvSpPr>
         <p:spPr>
           <a:xfrm>
-            <a:off x="457200" y="365760"/>
-            <a:ext cx="11247120" cy="822960"/>
+            <a:off x="1371600" y="2286000"/>
+            <a:ext cx="9144000" cy="1371600"/>
           </a:xfrm>
           <a:prstGeom prst="rect">
             <a:avLst/>
@@ -3686,18 +5044,25 @@
           <a:noFill/>
         </p:spPr>
         <p:txBody>
-          <a:bodyPr wrap="none">
-            <a:spAutoFit/>
-          </a:bodyPr>
-          <a:lstStyle/>
-          <a:p>
-            <a:r>
-              <a:rPr sz="2400" b="1">
+          <a:bodyPr wrap="square"/>
+          <a:lstStyle/>
+          <a:p>
+            <a:pPr algn="l">
+              <a:spcBef>
+                <a:spcPts val="0"/>
+              </a:spcBef>
+              <a:spcAft>
+                <a:spcPts val="0"/>
+              </a:spcAft>
+            </a:pPr>
+            <a:r>
+              <a:rPr sz="3200" b="1">
                 <a:solidFill>
-                  <a:srgbClr val="0B3D91"/>
+                  <a:srgbClr val="FFFFFF"/>
                 </a:solidFill>
+                <a:latin typeface="Calibri"/>
               </a:rPr>
-              <a:t>[2/22] Agenda</a:t>
+              <a:t>Agenda</a:t>
             </a:r>
           </a:p>
         </p:txBody>
@@ -3722,14 +5087,143 @@
       <p:grpSpPr/>
       <p:sp>
         <p:nvSpPr>
-          <p:cNvPr id="2" name="TextBox 1"/>
+          <p:cNvPr id="2" name="Rectangle 1"/>
+          <p:cNvSpPr/>
+          <p:nvPr/>
+        </p:nvSpPr>
+        <p:spPr>
+          <a:xfrm>
+            <a:off x="0" y="0"/>
+            <a:ext cx="365760" cy="6858000"/>
+          </a:xfrm>
+          <a:prstGeom prst="rect">
+            <a:avLst/>
+          </a:prstGeom>
+          <a:solidFill>
+            <a:srgbClr val="002B5C"/>
+          </a:solidFill>
+          <a:ln>
+            <a:noFill/>
+          </a:ln>
+        </p:spPr>
+        <p:style>
+          <a:lnRef idx="1">
+            <a:schemeClr val="accent1"/>
+          </a:lnRef>
+          <a:fillRef idx="3">
+            <a:schemeClr val="accent1"/>
+          </a:fillRef>
+          <a:effectRef idx="2">
+            <a:schemeClr val="accent1"/>
+          </a:effectRef>
+          <a:fontRef idx="minor">
+            <a:schemeClr val="lt1"/>
+          </a:fontRef>
+        </p:style>
+        <p:txBody>
+          <a:bodyPr rtlCol="0" anchor="ctr"/>
+          <a:lstStyle/>
+          <a:p>
+            <a:pPr algn="ctr"/>
+          </a:p>
+        </p:txBody>
+      </p:sp>
+      <p:sp>
+        <p:nvSpPr>
+          <p:cNvPr id="3" name="Rectangle 2"/>
+          <p:cNvSpPr/>
+          <p:nvPr/>
+        </p:nvSpPr>
+        <p:spPr>
+          <a:xfrm>
+            <a:off x="365760" y="0"/>
+            <a:ext cx="11825935" cy="36576"/>
+          </a:xfrm>
+          <a:prstGeom prst="rect">
+            <a:avLst/>
+          </a:prstGeom>
+          <a:solidFill>
+            <a:srgbClr val="007EE5"/>
+          </a:solidFill>
+          <a:ln>
+            <a:noFill/>
+          </a:ln>
+        </p:spPr>
+        <p:style>
+          <a:lnRef idx="1">
+            <a:schemeClr val="accent1"/>
+          </a:lnRef>
+          <a:fillRef idx="3">
+            <a:schemeClr val="accent1"/>
+          </a:fillRef>
+          <a:effectRef idx="2">
+            <a:schemeClr val="accent1"/>
+          </a:effectRef>
+          <a:fontRef idx="minor">
+            <a:schemeClr val="lt1"/>
+          </a:fontRef>
+        </p:style>
+        <p:txBody>
+          <a:bodyPr rtlCol="0" anchor="ctr"/>
+          <a:lstStyle/>
+          <a:p>
+            <a:pPr algn="ctr"/>
+          </a:p>
+        </p:txBody>
+      </p:sp>
+      <p:sp>
+        <p:nvSpPr>
+          <p:cNvPr id="4" name="Rectangle 3"/>
+          <p:cNvSpPr/>
+          <p:nvPr/>
+        </p:nvSpPr>
+        <p:spPr>
+          <a:xfrm>
+            <a:off x="365760" y="36576"/>
+            <a:ext cx="11825935" cy="1005840"/>
+          </a:xfrm>
+          <a:prstGeom prst="rect">
+            <a:avLst/>
+          </a:prstGeom>
+          <a:solidFill>
+            <a:srgbClr val="F7F8FA"/>
+          </a:solidFill>
+          <a:ln>
+            <a:noFill/>
+          </a:ln>
+        </p:spPr>
+        <p:style>
+          <a:lnRef idx="1">
+            <a:schemeClr val="accent1"/>
+          </a:lnRef>
+          <a:fillRef idx="3">
+            <a:schemeClr val="accent1"/>
+          </a:fillRef>
+          <a:effectRef idx="2">
+            <a:schemeClr val="accent1"/>
+          </a:effectRef>
+          <a:fontRef idx="minor">
+            <a:schemeClr val="lt1"/>
+          </a:fontRef>
+        </p:style>
+        <p:txBody>
+          <a:bodyPr rtlCol="0" anchor="ctr"/>
+          <a:lstStyle/>
+          <a:p>
+            <a:pPr algn="ctr"/>
+          </a:p>
+        </p:txBody>
+      </p:sp>
+      <p:sp>
+        <p:nvSpPr>
+          <p:cNvPr id="5" name="TextBox 4"/>
           <p:cNvSpPr txBox="1"/>
           <p:nvPr/>
         </p:nvSpPr>
         <p:spPr>
           <a:xfrm>
-            <a:off x="457200" y="365760"/>
-            <a:ext cx="11247120" cy="822960"/>
+            <a:off x="822960" y="164592"/>
+            <a:ext cx="10515600" cy="731520"/>
           </a:xfrm>
           <a:prstGeom prst="rect">
             <a:avLst/>
@@ -3737,18 +5231,191 @@
           <a:noFill/>
         </p:spPr>
         <p:txBody>
-          <a:bodyPr wrap="none">
-            <a:spAutoFit/>
-          </a:bodyPr>
-          <a:lstStyle/>
-          <a:p>
-            <a:r>
-              <a:rPr sz="2400" b="1">
+          <a:bodyPr wrap="square"/>
+          <a:lstStyle/>
+          <a:p>
+            <a:pPr algn="l">
+              <a:spcBef>
+                <a:spcPts val="0"/>
+              </a:spcBef>
+              <a:spcAft>
+                <a:spcPts val="0"/>
+              </a:spcAft>
+            </a:pPr>
+            <a:r>
+              <a:rPr sz="2200" b="1">
                 <a:solidFill>
-                  <a:srgbClr val="0B3D91"/>
+                  <a:srgbClr val="002B5C"/>
                 </a:solidFill>
+                <a:latin typeface="Calibri"/>
               </a:rPr>
               <a:t>[20/22] Annexes</a:t>
+            </a:r>
+          </a:p>
+        </p:txBody>
+      </p:sp>
+      <p:sp>
+        <p:nvSpPr>
+          <p:cNvPr id="6" name="Rectangle 5"/>
+          <p:cNvSpPr/>
+          <p:nvPr/>
+        </p:nvSpPr>
+        <p:spPr>
+          <a:xfrm>
+            <a:off x="822960" y="1042415"/>
+            <a:ext cx="10058400" cy="18288"/>
+          </a:xfrm>
+          <a:prstGeom prst="rect">
+            <a:avLst/>
+          </a:prstGeom>
+          <a:solidFill>
+            <a:srgbClr val="007EE5"/>
+          </a:solidFill>
+          <a:ln>
+            <a:noFill/>
+          </a:ln>
+        </p:spPr>
+        <p:style>
+          <a:lnRef idx="1">
+            <a:schemeClr val="accent1"/>
+          </a:lnRef>
+          <a:fillRef idx="3">
+            <a:schemeClr val="accent1"/>
+          </a:fillRef>
+          <a:effectRef idx="2">
+            <a:schemeClr val="accent1"/>
+          </a:effectRef>
+          <a:fontRef idx="minor">
+            <a:schemeClr val="lt1"/>
+          </a:fontRef>
+        </p:style>
+        <p:txBody>
+          <a:bodyPr rtlCol="0" anchor="ctr"/>
+          <a:lstStyle/>
+          <a:p>
+            <a:pPr algn="ctr"/>
+          </a:p>
+        </p:txBody>
+      </p:sp>
+      <p:sp>
+        <p:nvSpPr>
+          <p:cNvPr id="7" name="Rectangle 6"/>
+          <p:cNvSpPr/>
+          <p:nvPr/>
+        </p:nvSpPr>
+        <p:spPr>
+          <a:xfrm>
+            <a:off x="822960" y="6446520"/>
+            <a:ext cx="10515600" cy="9144"/>
+          </a:xfrm>
+          <a:prstGeom prst="rect">
+            <a:avLst/>
+          </a:prstGeom>
+          <a:solidFill>
+            <a:srgbClr val="6B7280"/>
+          </a:solidFill>
+          <a:ln>
+            <a:noFill/>
+          </a:ln>
+        </p:spPr>
+        <p:style>
+          <a:lnRef idx="1">
+            <a:schemeClr val="accent1"/>
+          </a:lnRef>
+          <a:fillRef idx="3">
+            <a:schemeClr val="accent1"/>
+          </a:fillRef>
+          <a:effectRef idx="2">
+            <a:schemeClr val="accent1"/>
+          </a:effectRef>
+          <a:fontRef idx="minor">
+            <a:schemeClr val="lt1"/>
+          </a:fontRef>
+        </p:style>
+        <p:txBody>
+          <a:bodyPr rtlCol="0" anchor="ctr"/>
+          <a:lstStyle/>
+          <a:p>
+            <a:pPr algn="ctr"/>
+          </a:p>
+        </p:txBody>
+      </p:sp>
+      <p:sp>
+        <p:nvSpPr>
+          <p:cNvPr id="8" name="TextBox 7"/>
+          <p:cNvSpPr txBox="1"/>
+          <p:nvPr/>
+        </p:nvSpPr>
+        <p:spPr>
+          <a:xfrm>
+            <a:off x="11155680" y="6492240"/>
+            <a:ext cx="731520" cy="274320"/>
+          </a:xfrm>
+          <a:prstGeom prst="rect">
+            <a:avLst/>
+          </a:prstGeom>
+          <a:noFill/>
+        </p:spPr>
+        <p:txBody>
+          <a:bodyPr wrap="square"/>
+          <a:lstStyle/>
+          <a:p>
+            <a:pPr algn="r">
+              <a:spcBef>
+                <a:spcPts val="0"/>
+              </a:spcBef>
+              <a:spcAft>
+                <a:spcPts val="0"/>
+              </a:spcAft>
+            </a:pPr>
+            <a:r>
+              <a:rPr sz="900" b="0">
+                <a:solidFill>
+                  <a:srgbClr val="6B7280"/>
+                </a:solidFill>
+                <a:latin typeface="Calibri"/>
+              </a:rPr>
+              <a:t>20/22</a:t>
+            </a:r>
+          </a:p>
+        </p:txBody>
+      </p:sp>
+      <p:sp>
+        <p:nvSpPr>
+          <p:cNvPr id="9" name="TextBox 8"/>
+          <p:cNvSpPr txBox="1"/>
+          <p:nvPr/>
+        </p:nvSpPr>
+        <p:spPr>
+          <a:xfrm>
+            <a:off x="822960" y="6492240"/>
+            <a:ext cx="2743200" cy="274320"/>
+          </a:xfrm>
+          <a:prstGeom prst="rect">
+            <a:avLst/>
+          </a:prstGeom>
+          <a:noFill/>
+        </p:spPr>
+        <p:txBody>
+          <a:bodyPr wrap="square"/>
+          <a:lstStyle/>
+          <a:p>
+            <a:pPr algn="l">
+              <a:spcBef>
+                <a:spcPts val="0"/>
+              </a:spcBef>
+              <a:spcAft>
+                <a:spcPts val="0"/>
+              </a:spcAft>
+            </a:pPr>
+            <a:r>
+              <a:rPr sz="800" b="0">
+                <a:solidFill>
+                  <a:srgbClr val="6B7280"/>
+                </a:solidFill>
+                <a:latin typeface="Calibri"/>
+              </a:rPr>
+              <a:t>CONFIDENTIEL</a:t>
             </a:r>
           </a:p>
         </p:txBody>
@@ -3773,14 +5440,143 @@
       <p:grpSpPr/>
       <p:sp>
         <p:nvSpPr>
-          <p:cNvPr id="2" name="TextBox 1"/>
+          <p:cNvPr id="2" name="Rectangle 1"/>
+          <p:cNvSpPr/>
+          <p:nvPr/>
+        </p:nvSpPr>
+        <p:spPr>
+          <a:xfrm>
+            <a:off x="0" y="0"/>
+            <a:ext cx="365760" cy="6858000"/>
+          </a:xfrm>
+          <a:prstGeom prst="rect">
+            <a:avLst/>
+          </a:prstGeom>
+          <a:solidFill>
+            <a:srgbClr val="002B5C"/>
+          </a:solidFill>
+          <a:ln>
+            <a:noFill/>
+          </a:ln>
+        </p:spPr>
+        <p:style>
+          <a:lnRef idx="1">
+            <a:schemeClr val="accent1"/>
+          </a:lnRef>
+          <a:fillRef idx="3">
+            <a:schemeClr val="accent1"/>
+          </a:fillRef>
+          <a:effectRef idx="2">
+            <a:schemeClr val="accent1"/>
+          </a:effectRef>
+          <a:fontRef idx="minor">
+            <a:schemeClr val="lt1"/>
+          </a:fontRef>
+        </p:style>
+        <p:txBody>
+          <a:bodyPr rtlCol="0" anchor="ctr"/>
+          <a:lstStyle/>
+          <a:p>
+            <a:pPr algn="ctr"/>
+          </a:p>
+        </p:txBody>
+      </p:sp>
+      <p:sp>
+        <p:nvSpPr>
+          <p:cNvPr id="3" name="Rectangle 2"/>
+          <p:cNvSpPr/>
+          <p:nvPr/>
+        </p:nvSpPr>
+        <p:spPr>
+          <a:xfrm>
+            <a:off x="365760" y="0"/>
+            <a:ext cx="11825935" cy="36576"/>
+          </a:xfrm>
+          <a:prstGeom prst="rect">
+            <a:avLst/>
+          </a:prstGeom>
+          <a:solidFill>
+            <a:srgbClr val="007EE5"/>
+          </a:solidFill>
+          <a:ln>
+            <a:noFill/>
+          </a:ln>
+        </p:spPr>
+        <p:style>
+          <a:lnRef idx="1">
+            <a:schemeClr val="accent1"/>
+          </a:lnRef>
+          <a:fillRef idx="3">
+            <a:schemeClr val="accent1"/>
+          </a:fillRef>
+          <a:effectRef idx="2">
+            <a:schemeClr val="accent1"/>
+          </a:effectRef>
+          <a:fontRef idx="minor">
+            <a:schemeClr val="lt1"/>
+          </a:fontRef>
+        </p:style>
+        <p:txBody>
+          <a:bodyPr rtlCol="0" anchor="ctr"/>
+          <a:lstStyle/>
+          <a:p>
+            <a:pPr algn="ctr"/>
+          </a:p>
+        </p:txBody>
+      </p:sp>
+      <p:sp>
+        <p:nvSpPr>
+          <p:cNvPr id="4" name="Rectangle 3"/>
+          <p:cNvSpPr/>
+          <p:nvPr/>
+        </p:nvSpPr>
+        <p:spPr>
+          <a:xfrm>
+            <a:off x="365760" y="36576"/>
+            <a:ext cx="11825935" cy="1005840"/>
+          </a:xfrm>
+          <a:prstGeom prst="rect">
+            <a:avLst/>
+          </a:prstGeom>
+          <a:solidFill>
+            <a:srgbClr val="F7F8FA"/>
+          </a:solidFill>
+          <a:ln>
+            <a:noFill/>
+          </a:ln>
+        </p:spPr>
+        <p:style>
+          <a:lnRef idx="1">
+            <a:schemeClr val="accent1"/>
+          </a:lnRef>
+          <a:fillRef idx="3">
+            <a:schemeClr val="accent1"/>
+          </a:fillRef>
+          <a:effectRef idx="2">
+            <a:schemeClr val="accent1"/>
+          </a:effectRef>
+          <a:fontRef idx="minor">
+            <a:schemeClr val="lt1"/>
+          </a:fontRef>
+        </p:style>
+        <p:txBody>
+          <a:bodyPr rtlCol="0" anchor="ctr"/>
+          <a:lstStyle/>
+          <a:p>
+            <a:pPr algn="ctr"/>
+          </a:p>
+        </p:txBody>
+      </p:sp>
+      <p:sp>
+        <p:nvSpPr>
+          <p:cNvPr id="5" name="TextBox 4"/>
           <p:cNvSpPr txBox="1"/>
           <p:nvPr/>
         </p:nvSpPr>
         <p:spPr>
           <a:xfrm>
-            <a:off x="457200" y="365760"/>
-            <a:ext cx="11247120" cy="822960"/>
+            <a:off x="822960" y="164592"/>
+            <a:ext cx="10515600" cy="731520"/>
           </a:xfrm>
           <a:prstGeom prst="rect">
             <a:avLst/>
@@ -3788,18 +5584,191 @@
           <a:noFill/>
         </p:spPr>
         <p:txBody>
-          <a:bodyPr wrap="none">
-            <a:spAutoFit/>
-          </a:bodyPr>
-          <a:lstStyle/>
-          <a:p>
-            <a:r>
-              <a:rPr sz="2400" b="1">
+          <a:bodyPr wrap="square"/>
+          <a:lstStyle/>
+          <a:p>
+            <a:pPr algn="l">
+              <a:spcBef>
+                <a:spcPts val="0"/>
+              </a:spcBef>
+              <a:spcAft>
+                <a:spcPts val="0"/>
+              </a:spcAft>
+            </a:pPr>
+            <a:r>
+              <a:rPr sz="2200" b="1">
                 <a:solidFill>
-                  <a:srgbClr val="0B3D91"/>
+                  <a:srgbClr val="002B5C"/>
                 </a:solidFill>
+                <a:latin typeface="Calibri"/>
               </a:rPr>
               <a:t>[21/22] Sources</a:t>
+            </a:r>
+          </a:p>
+        </p:txBody>
+      </p:sp>
+      <p:sp>
+        <p:nvSpPr>
+          <p:cNvPr id="6" name="Rectangle 5"/>
+          <p:cNvSpPr/>
+          <p:nvPr/>
+        </p:nvSpPr>
+        <p:spPr>
+          <a:xfrm>
+            <a:off x="822960" y="1042415"/>
+            <a:ext cx="10058400" cy="18288"/>
+          </a:xfrm>
+          <a:prstGeom prst="rect">
+            <a:avLst/>
+          </a:prstGeom>
+          <a:solidFill>
+            <a:srgbClr val="007EE5"/>
+          </a:solidFill>
+          <a:ln>
+            <a:noFill/>
+          </a:ln>
+        </p:spPr>
+        <p:style>
+          <a:lnRef idx="1">
+            <a:schemeClr val="accent1"/>
+          </a:lnRef>
+          <a:fillRef idx="3">
+            <a:schemeClr val="accent1"/>
+          </a:fillRef>
+          <a:effectRef idx="2">
+            <a:schemeClr val="accent1"/>
+          </a:effectRef>
+          <a:fontRef idx="minor">
+            <a:schemeClr val="lt1"/>
+          </a:fontRef>
+        </p:style>
+        <p:txBody>
+          <a:bodyPr rtlCol="0" anchor="ctr"/>
+          <a:lstStyle/>
+          <a:p>
+            <a:pPr algn="ctr"/>
+          </a:p>
+        </p:txBody>
+      </p:sp>
+      <p:sp>
+        <p:nvSpPr>
+          <p:cNvPr id="7" name="Rectangle 6"/>
+          <p:cNvSpPr/>
+          <p:nvPr/>
+        </p:nvSpPr>
+        <p:spPr>
+          <a:xfrm>
+            <a:off x="822960" y="6446520"/>
+            <a:ext cx="10515600" cy="9144"/>
+          </a:xfrm>
+          <a:prstGeom prst="rect">
+            <a:avLst/>
+          </a:prstGeom>
+          <a:solidFill>
+            <a:srgbClr val="6B7280"/>
+          </a:solidFill>
+          <a:ln>
+            <a:noFill/>
+          </a:ln>
+        </p:spPr>
+        <p:style>
+          <a:lnRef idx="1">
+            <a:schemeClr val="accent1"/>
+          </a:lnRef>
+          <a:fillRef idx="3">
+            <a:schemeClr val="accent1"/>
+          </a:fillRef>
+          <a:effectRef idx="2">
+            <a:schemeClr val="accent1"/>
+          </a:effectRef>
+          <a:fontRef idx="minor">
+            <a:schemeClr val="lt1"/>
+          </a:fontRef>
+        </p:style>
+        <p:txBody>
+          <a:bodyPr rtlCol="0" anchor="ctr"/>
+          <a:lstStyle/>
+          <a:p>
+            <a:pPr algn="ctr"/>
+          </a:p>
+        </p:txBody>
+      </p:sp>
+      <p:sp>
+        <p:nvSpPr>
+          <p:cNvPr id="8" name="TextBox 7"/>
+          <p:cNvSpPr txBox="1"/>
+          <p:nvPr/>
+        </p:nvSpPr>
+        <p:spPr>
+          <a:xfrm>
+            <a:off x="11155680" y="6492240"/>
+            <a:ext cx="731520" cy="274320"/>
+          </a:xfrm>
+          <a:prstGeom prst="rect">
+            <a:avLst/>
+          </a:prstGeom>
+          <a:noFill/>
+        </p:spPr>
+        <p:txBody>
+          <a:bodyPr wrap="square"/>
+          <a:lstStyle/>
+          <a:p>
+            <a:pPr algn="r">
+              <a:spcBef>
+                <a:spcPts val="0"/>
+              </a:spcBef>
+              <a:spcAft>
+                <a:spcPts val="0"/>
+              </a:spcAft>
+            </a:pPr>
+            <a:r>
+              <a:rPr sz="900" b="0">
+                <a:solidFill>
+                  <a:srgbClr val="6B7280"/>
+                </a:solidFill>
+                <a:latin typeface="Calibri"/>
+              </a:rPr>
+              <a:t>21/22</a:t>
+            </a:r>
+          </a:p>
+        </p:txBody>
+      </p:sp>
+      <p:sp>
+        <p:nvSpPr>
+          <p:cNvPr id="9" name="TextBox 8"/>
+          <p:cNvSpPr txBox="1"/>
+          <p:nvPr/>
+        </p:nvSpPr>
+        <p:spPr>
+          <a:xfrm>
+            <a:off x="822960" y="6492240"/>
+            <a:ext cx="2743200" cy="274320"/>
+          </a:xfrm>
+          <a:prstGeom prst="rect">
+            <a:avLst/>
+          </a:prstGeom>
+          <a:noFill/>
+        </p:spPr>
+        <p:txBody>
+          <a:bodyPr wrap="square"/>
+          <a:lstStyle/>
+          <a:p>
+            <a:pPr algn="l">
+              <a:spcBef>
+                <a:spcPts val="0"/>
+              </a:spcBef>
+              <a:spcAft>
+                <a:spcPts val="0"/>
+              </a:spcAft>
+            </a:pPr>
+            <a:r>
+              <a:rPr sz="800" b="0">
+                <a:solidFill>
+                  <a:srgbClr val="6B7280"/>
+                </a:solidFill>
+                <a:latin typeface="Calibri"/>
+              </a:rPr>
+              <a:t>CONFIDENTIEL</a:t>
             </a:r>
           </a:p>
         </p:txBody>
@@ -3824,14 +5793,143 @@
       <p:grpSpPr/>
       <p:sp>
         <p:nvSpPr>
-          <p:cNvPr id="2" name="TextBox 1"/>
+          <p:cNvPr id="2" name="Rectangle 1"/>
+          <p:cNvSpPr/>
+          <p:nvPr/>
+        </p:nvSpPr>
+        <p:spPr>
+          <a:xfrm>
+            <a:off x="0" y="0"/>
+            <a:ext cx="365760" cy="6858000"/>
+          </a:xfrm>
+          <a:prstGeom prst="rect">
+            <a:avLst/>
+          </a:prstGeom>
+          <a:solidFill>
+            <a:srgbClr val="002B5C"/>
+          </a:solidFill>
+          <a:ln>
+            <a:noFill/>
+          </a:ln>
+        </p:spPr>
+        <p:style>
+          <a:lnRef idx="1">
+            <a:schemeClr val="accent1"/>
+          </a:lnRef>
+          <a:fillRef idx="3">
+            <a:schemeClr val="accent1"/>
+          </a:fillRef>
+          <a:effectRef idx="2">
+            <a:schemeClr val="accent1"/>
+          </a:effectRef>
+          <a:fontRef idx="minor">
+            <a:schemeClr val="lt1"/>
+          </a:fontRef>
+        </p:style>
+        <p:txBody>
+          <a:bodyPr rtlCol="0" anchor="ctr"/>
+          <a:lstStyle/>
+          <a:p>
+            <a:pPr algn="ctr"/>
+          </a:p>
+        </p:txBody>
+      </p:sp>
+      <p:sp>
+        <p:nvSpPr>
+          <p:cNvPr id="3" name="Rectangle 2"/>
+          <p:cNvSpPr/>
+          <p:nvPr/>
+        </p:nvSpPr>
+        <p:spPr>
+          <a:xfrm>
+            <a:off x="365760" y="0"/>
+            <a:ext cx="11825935" cy="36576"/>
+          </a:xfrm>
+          <a:prstGeom prst="rect">
+            <a:avLst/>
+          </a:prstGeom>
+          <a:solidFill>
+            <a:srgbClr val="007EE5"/>
+          </a:solidFill>
+          <a:ln>
+            <a:noFill/>
+          </a:ln>
+        </p:spPr>
+        <p:style>
+          <a:lnRef idx="1">
+            <a:schemeClr val="accent1"/>
+          </a:lnRef>
+          <a:fillRef idx="3">
+            <a:schemeClr val="accent1"/>
+          </a:fillRef>
+          <a:effectRef idx="2">
+            <a:schemeClr val="accent1"/>
+          </a:effectRef>
+          <a:fontRef idx="minor">
+            <a:schemeClr val="lt1"/>
+          </a:fontRef>
+        </p:style>
+        <p:txBody>
+          <a:bodyPr rtlCol="0" anchor="ctr"/>
+          <a:lstStyle/>
+          <a:p>
+            <a:pPr algn="ctr"/>
+          </a:p>
+        </p:txBody>
+      </p:sp>
+      <p:sp>
+        <p:nvSpPr>
+          <p:cNvPr id="4" name="Rectangle 3"/>
+          <p:cNvSpPr/>
+          <p:nvPr/>
+        </p:nvSpPr>
+        <p:spPr>
+          <a:xfrm>
+            <a:off x="365760" y="36576"/>
+            <a:ext cx="11825935" cy="1005840"/>
+          </a:xfrm>
+          <a:prstGeom prst="rect">
+            <a:avLst/>
+          </a:prstGeom>
+          <a:solidFill>
+            <a:srgbClr val="F7F8FA"/>
+          </a:solidFill>
+          <a:ln>
+            <a:noFill/>
+          </a:ln>
+        </p:spPr>
+        <p:style>
+          <a:lnRef idx="1">
+            <a:schemeClr val="accent1"/>
+          </a:lnRef>
+          <a:fillRef idx="3">
+            <a:schemeClr val="accent1"/>
+          </a:fillRef>
+          <a:effectRef idx="2">
+            <a:schemeClr val="accent1"/>
+          </a:effectRef>
+          <a:fontRef idx="minor">
+            <a:schemeClr val="lt1"/>
+          </a:fontRef>
+        </p:style>
+        <p:txBody>
+          <a:bodyPr rtlCol="0" anchor="ctr"/>
+          <a:lstStyle/>
+          <a:p>
+            <a:pPr algn="ctr"/>
+          </a:p>
+        </p:txBody>
+      </p:sp>
+      <p:sp>
+        <p:nvSpPr>
+          <p:cNvPr id="5" name="TextBox 4"/>
           <p:cNvSpPr txBox="1"/>
           <p:nvPr/>
         </p:nvSpPr>
         <p:spPr>
           <a:xfrm>
-            <a:off x="457200" y="365760"/>
-            <a:ext cx="11247120" cy="822960"/>
+            <a:off x="822960" y="164592"/>
+            <a:ext cx="10515600" cy="731520"/>
           </a:xfrm>
           <a:prstGeom prst="rect">
             <a:avLst/>
@@ -3839,18 +5937,191 @@
           <a:noFill/>
         </p:spPr>
         <p:txBody>
-          <a:bodyPr wrap="none">
-            <a:spAutoFit/>
-          </a:bodyPr>
-          <a:lstStyle/>
-          <a:p>
-            <a:r>
-              <a:rPr sz="2400" b="1">
+          <a:bodyPr wrap="square"/>
+          <a:lstStyle/>
+          <a:p>
+            <a:pPr algn="l">
+              <a:spcBef>
+                <a:spcPts val="0"/>
+              </a:spcBef>
+              <a:spcAft>
+                <a:spcPts val="0"/>
+              </a:spcAft>
+            </a:pPr>
+            <a:r>
+              <a:rPr sz="2200" b="1">
                 <a:solidFill>
-                  <a:srgbClr val="0B3D91"/>
+                  <a:srgbClr val="002B5C"/>
                 </a:solidFill>
+                <a:latin typeface="Calibri"/>
               </a:rPr>
               <a:t>[3/22] Key message</a:t>
+            </a:r>
+          </a:p>
+        </p:txBody>
+      </p:sp>
+      <p:sp>
+        <p:nvSpPr>
+          <p:cNvPr id="6" name="Rectangle 5"/>
+          <p:cNvSpPr/>
+          <p:nvPr/>
+        </p:nvSpPr>
+        <p:spPr>
+          <a:xfrm>
+            <a:off x="822960" y="1042415"/>
+            <a:ext cx="10058400" cy="18288"/>
+          </a:xfrm>
+          <a:prstGeom prst="rect">
+            <a:avLst/>
+          </a:prstGeom>
+          <a:solidFill>
+            <a:srgbClr val="007EE5"/>
+          </a:solidFill>
+          <a:ln>
+            <a:noFill/>
+          </a:ln>
+        </p:spPr>
+        <p:style>
+          <a:lnRef idx="1">
+            <a:schemeClr val="accent1"/>
+          </a:lnRef>
+          <a:fillRef idx="3">
+            <a:schemeClr val="accent1"/>
+          </a:fillRef>
+          <a:effectRef idx="2">
+            <a:schemeClr val="accent1"/>
+          </a:effectRef>
+          <a:fontRef idx="minor">
+            <a:schemeClr val="lt1"/>
+          </a:fontRef>
+        </p:style>
+        <p:txBody>
+          <a:bodyPr rtlCol="0" anchor="ctr"/>
+          <a:lstStyle/>
+          <a:p>
+            <a:pPr algn="ctr"/>
+          </a:p>
+        </p:txBody>
+      </p:sp>
+      <p:sp>
+        <p:nvSpPr>
+          <p:cNvPr id="7" name="Rectangle 6"/>
+          <p:cNvSpPr/>
+          <p:nvPr/>
+        </p:nvSpPr>
+        <p:spPr>
+          <a:xfrm>
+            <a:off x="822960" y="6446520"/>
+            <a:ext cx="10515600" cy="9144"/>
+          </a:xfrm>
+          <a:prstGeom prst="rect">
+            <a:avLst/>
+          </a:prstGeom>
+          <a:solidFill>
+            <a:srgbClr val="6B7280"/>
+          </a:solidFill>
+          <a:ln>
+            <a:noFill/>
+          </a:ln>
+        </p:spPr>
+        <p:style>
+          <a:lnRef idx="1">
+            <a:schemeClr val="accent1"/>
+          </a:lnRef>
+          <a:fillRef idx="3">
+            <a:schemeClr val="accent1"/>
+          </a:fillRef>
+          <a:effectRef idx="2">
+            <a:schemeClr val="accent1"/>
+          </a:effectRef>
+          <a:fontRef idx="minor">
+            <a:schemeClr val="lt1"/>
+          </a:fontRef>
+        </p:style>
+        <p:txBody>
+          <a:bodyPr rtlCol="0" anchor="ctr"/>
+          <a:lstStyle/>
+          <a:p>
+            <a:pPr algn="ctr"/>
+          </a:p>
+        </p:txBody>
+      </p:sp>
+      <p:sp>
+        <p:nvSpPr>
+          <p:cNvPr id="8" name="TextBox 7"/>
+          <p:cNvSpPr txBox="1"/>
+          <p:nvPr/>
+        </p:nvSpPr>
+        <p:spPr>
+          <a:xfrm>
+            <a:off x="11155680" y="6492240"/>
+            <a:ext cx="731520" cy="274320"/>
+          </a:xfrm>
+          <a:prstGeom prst="rect">
+            <a:avLst/>
+          </a:prstGeom>
+          <a:noFill/>
+        </p:spPr>
+        <p:txBody>
+          <a:bodyPr wrap="square"/>
+          <a:lstStyle/>
+          <a:p>
+            <a:pPr algn="r">
+              <a:spcBef>
+                <a:spcPts val="0"/>
+              </a:spcBef>
+              <a:spcAft>
+                <a:spcPts val="0"/>
+              </a:spcAft>
+            </a:pPr>
+            <a:r>
+              <a:rPr sz="900" b="0">
+                <a:solidFill>
+                  <a:srgbClr val="6B7280"/>
+                </a:solidFill>
+                <a:latin typeface="Calibri"/>
+              </a:rPr>
+              <a:t>3/22</a:t>
+            </a:r>
+          </a:p>
+        </p:txBody>
+      </p:sp>
+      <p:sp>
+        <p:nvSpPr>
+          <p:cNvPr id="9" name="TextBox 8"/>
+          <p:cNvSpPr txBox="1"/>
+          <p:nvPr/>
+        </p:nvSpPr>
+        <p:spPr>
+          <a:xfrm>
+            <a:off x="822960" y="6492240"/>
+            <a:ext cx="2743200" cy="274320"/>
+          </a:xfrm>
+          <a:prstGeom prst="rect">
+            <a:avLst/>
+          </a:prstGeom>
+          <a:noFill/>
+        </p:spPr>
+        <p:txBody>
+          <a:bodyPr wrap="square"/>
+          <a:lstStyle/>
+          <a:p>
+            <a:pPr algn="l">
+              <a:spcBef>
+                <a:spcPts val="0"/>
+              </a:spcBef>
+              <a:spcAft>
+                <a:spcPts val="0"/>
+              </a:spcAft>
+            </a:pPr>
+            <a:r>
+              <a:rPr sz="800" b="0">
+                <a:solidFill>
+                  <a:srgbClr val="6B7280"/>
+                </a:solidFill>
+                <a:latin typeface="Calibri"/>
+              </a:rPr>
+              <a:t>CONFIDENTIEL</a:t>
             </a:r>
           </a:p>
         </p:txBody>
@@ -3875,14 +6146,100 @@
       <p:grpSpPr/>
       <p:sp>
         <p:nvSpPr>
-          <p:cNvPr id="2" name="TextBox 1"/>
+          <p:cNvPr id="2" name="Rectangle 1"/>
+          <p:cNvSpPr/>
+          <p:nvPr/>
+        </p:nvSpPr>
+        <p:spPr>
+          <a:xfrm>
+            <a:off x="0" y="0"/>
+            <a:ext cx="12191695" cy="6858000"/>
+          </a:xfrm>
+          <a:prstGeom prst="rect">
+            <a:avLst/>
+          </a:prstGeom>
+          <a:solidFill>
+            <a:srgbClr val="002B5C"/>
+          </a:solidFill>
+          <a:ln>
+            <a:noFill/>
+          </a:ln>
+        </p:spPr>
+        <p:style>
+          <a:lnRef idx="1">
+            <a:schemeClr val="accent1"/>
+          </a:lnRef>
+          <a:fillRef idx="3">
+            <a:schemeClr val="accent1"/>
+          </a:fillRef>
+          <a:effectRef idx="2">
+            <a:schemeClr val="accent1"/>
+          </a:effectRef>
+          <a:fontRef idx="minor">
+            <a:schemeClr val="lt1"/>
+          </a:fontRef>
+        </p:style>
+        <p:txBody>
+          <a:bodyPr rtlCol="0" anchor="ctr"/>
+          <a:lstStyle/>
+          <a:p>
+            <a:pPr algn="ctr"/>
+          </a:p>
+        </p:txBody>
+      </p:sp>
+      <p:sp>
+        <p:nvSpPr>
+          <p:cNvPr id="3" name="Rectangle 2"/>
+          <p:cNvSpPr/>
+          <p:nvPr/>
+        </p:nvSpPr>
+        <p:spPr>
+          <a:xfrm>
+            <a:off x="1371600" y="3840480"/>
+            <a:ext cx="2743200" cy="45720"/>
+          </a:xfrm>
+          <a:prstGeom prst="rect">
+            <a:avLst/>
+          </a:prstGeom>
+          <a:solidFill>
+            <a:srgbClr val="007EE5"/>
+          </a:solidFill>
+          <a:ln>
+            <a:noFill/>
+          </a:ln>
+        </p:spPr>
+        <p:style>
+          <a:lnRef idx="1">
+            <a:schemeClr val="accent1"/>
+          </a:lnRef>
+          <a:fillRef idx="3">
+            <a:schemeClr val="accent1"/>
+          </a:fillRef>
+          <a:effectRef idx="2">
+            <a:schemeClr val="accent1"/>
+          </a:effectRef>
+          <a:fontRef idx="minor">
+            <a:schemeClr val="lt1"/>
+          </a:fontRef>
+        </p:style>
+        <p:txBody>
+          <a:bodyPr rtlCol="0" anchor="ctr"/>
+          <a:lstStyle/>
+          <a:p>
+            <a:pPr algn="ctr"/>
+          </a:p>
+        </p:txBody>
+      </p:sp>
+      <p:sp>
+        <p:nvSpPr>
+          <p:cNvPr id="4" name="TextBox 3"/>
           <p:cNvSpPr txBox="1"/>
           <p:nvPr/>
         </p:nvSpPr>
         <p:spPr>
           <a:xfrm>
-            <a:off x="457200" y="365760"/>
-            <a:ext cx="11247120" cy="822960"/>
+            <a:off x="1371600" y="2286000"/>
+            <a:ext cx="9144000" cy="1371600"/>
           </a:xfrm>
           <a:prstGeom prst="rect">
             <a:avLst/>
@@ -3890,18 +6247,25 @@
           <a:noFill/>
         </p:spPr>
         <p:txBody>
-          <a:bodyPr wrap="none">
-            <a:spAutoFit/>
-          </a:bodyPr>
-          <a:lstStyle/>
-          <a:p>
-            <a:r>
-              <a:rPr sz="2400" b="1">
+          <a:bodyPr wrap="square"/>
+          <a:lstStyle/>
+          <a:p>
+            <a:pPr algn="l">
+              <a:spcBef>
+                <a:spcPts val="0"/>
+              </a:spcBef>
+              <a:spcAft>
+                <a:spcPts val="0"/>
+              </a:spcAft>
+            </a:pPr>
+            <a:r>
+              <a:rPr sz="3200" b="1">
                 <a:solidFill>
-                  <a:srgbClr val="0B3D91"/>
+                  <a:srgbClr val="FFFFFF"/>
                 </a:solidFill>
+                <a:latin typeface="Calibri"/>
               </a:rPr>
-              <a:t>[4/22] Context</a:t>
+              <a:t>Context</a:t>
             </a:r>
           </a:p>
         </p:txBody>
@@ -3926,14 +6290,100 @@
       <p:grpSpPr/>
       <p:sp>
         <p:nvSpPr>
-          <p:cNvPr id="2" name="TextBox 1"/>
+          <p:cNvPr id="2" name="Rectangle 1"/>
+          <p:cNvSpPr/>
+          <p:nvPr/>
+        </p:nvSpPr>
+        <p:spPr>
+          <a:xfrm>
+            <a:off x="0" y="0"/>
+            <a:ext cx="12191695" cy="6858000"/>
+          </a:xfrm>
+          <a:prstGeom prst="rect">
+            <a:avLst/>
+          </a:prstGeom>
+          <a:solidFill>
+            <a:srgbClr val="002B5C"/>
+          </a:solidFill>
+          <a:ln>
+            <a:noFill/>
+          </a:ln>
+        </p:spPr>
+        <p:style>
+          <a:lnRef idx="1">
+            <a:schemeClr val="accent1"/>
+          </a:lnRef>
+          <a:fillRef idx="3">
+            <a:schemeClr val="accent1"/>
+          </a:fillRef>
+          <a:effectRef idx="2">
+            <a:schemeClr val="accent1"/>
+          </a:effectRef>
+          <a:fontRef idx="minor">
+            <a:schemeClr val="lt1"/>
+          </a:fontRef>
+        </p:style>
+        <p:txBody>
+          <a:bodyPr rtlCol="0" anchor="ctr"/>
+          <a:lstStyle/>
+          <a:p>
+            <a:pPr algn="ctr"/>
+          </a:p>
+        </p:txBody>
+      </p:sp>
+      <p:sp>
+        <p:nvSpPr>
+          <p:cNvPr id="3" name="Rectangle 2"/>
+          <p:cNvSpPr/>
+          <p:nvPr/>
+        </p:nvSpPr>
+        <p:spPr>
+          <a:xfrm>
+            <a:off x="1371600" y="3840480"/>
+            <a:ext cx="2743200" cy="45720"/>
+          </a:xfrm>
+          <a:prstGeom prst="rect">
+            <a:avLst/>
+          </a:prstGeom>
+          <a:solidFill>
+            <a:srgbClr val="007EE5"/>
+          </a:solidFill>
+          <a:ln>
+            <a:noFill/>
+          </a:ln>
+        </p:spPr>
+        <p:style>
+          <a:lnRef idx="1">
+            <a:schemeClr val="accent1"/>
+          </a:lnRef>
+          <a:fillRef idx="3">
+            <a:schemeClr val="accent1"/>
+          </a:fillRef>
+          <a:effectRef idx="2">
+            <a:schemeClr val="accent1"/>
+          </a:effectRef>
+          <a:fontRef idx="minor">
+            <a:schemeClr val="lt1"/>
+          </a:fontRef>
+        </p:style>
+        <p:txBody>
+          <a:bodyPr rtlCol="0" anchor="ctr"/>
+          <a:lstStyle/>
+          <a:p>
+            <a:pPr algn="ctr"/>
+          </a:p>
+        </p:txBody>
+      </p:sp>
+      <p:sp>
+        <p:nvSpPr>
+          <p:cNvPr id="4" name="TextBox 3"/>
           <p:cNvSpPr txBox="1"/>
           <p:nvPr/>
         </p:nvSpPr>
         <p:spPr>
           <a:xfrm>
-            <a:off x="457200" y="365760"/>
-            <a:ext cx="11247120" cy="822960"/>
+            <a:off x="1371600" y="2286000"/>
+            <a:ext cx="9144000" cy="1371600"/>
           </a:xfrm>
           <a:prstGeom prst="rect">
             <a:avLst/>
@@ -3941,18 +6391,25 @@
           <a:noFill/>
         </p:spPr>
         <p:txBody>
-          <a:bodyPr wrap="none">
-            <a:spAutoFit/>
-          </a:bodyPr>
-          <a:lstStyle/>
-          <a:p>
-            <a:r>
-              <a:rPr sz="2400" b="1">
+          <a:bodyPr wrap="square"/>
+          <a:lstStyle/>
+          <a:p>
+            <a:pPr algn="l">
+              <a:spcBef>
+                <a:spcPts val="0"/>
+              </a:spcBef>
+              <a:spcAft>
+                <a:spcPts val="0"/>
+              </a:spcAft>
+            </a:pPr>
+            <a:r>
+              <a:rPr sz="3200" b="1">
                 <a:solidFill>
-                  <a:srgbClr val="0B3D91"/>
+                  <a:srgbClr val="FFFFFF"/>
                 </a:solidFill>
+                <a:latin typeface="Calibri"/>
               </a:rPr>
-              <a:t>[5/22] Section 1</a:t>
+              <a:t>Section 1</a:t>
             </a:r>
           </a:p>
         </p:txBody>
@@ -3977,14 +6434,100 @@
       <p:grpSpPr/>
       <p:sp>
         <p:nvSpPr>
-          <p:cNvPr id="2" name="TextBox 1"/>
+          <p:cNvPr id="2" name="Rectangle 1"/>
+          <p:cNvSpPr/>
+          <p:nvPr/>
+        </p:nvSpPr>
+        <p:spPr>
+          <a:xfrm>
+            <a:off x="0" y="0"/>
+            <a:ext cx="12191695" cy="6858000"/>
+          </a:xfrm>
+          <a:prstGeom prst="rect">
+            <a:avLst/>
+          </a:prstGeom>
+          <a:solidFill>
+            <a:srgbClr val="002B5C"/>
+          </a:solidFill>
+          <a:ln>
+            <a:noFill/>
+          </a:ln>
+        </p:spPr>
+        <p:style>
+          <a:lnRef idx="1">
+            <a:schemeClr val="accent1"/>
+          </a:lnRef>
+          <a:fillRef idx="3">
+            <a:schemeClr val="accent1"/>
+          </a:fillRef>
+          <a:effectRef idx="2">
+            <a:schemeClr val="accent1"/>
+          </a:effectRef>
+          <a:fontRef idx="minor">
+            <a:schemeClr val="lt1"/>
+          </a:fontRef>
+        </p:style>
+        <p:txBody>
+          <a:bodyPr rtlCol="0" anchor="ctr"/>
+          <a:lstStyle/>
+          <a:p>
+            <a:pPr algn="ctr"/>
+          </a:p>
+        </p:txBody>
+      </p:sp>
+      <p:sp>
+        <p:nvSpPr>
+          <p:cNvPr id="3" name="Rectangle 2"/>
+          <p:cNvSpPr/>
+          <p:nvPr/>
+        </p:nvSpPr>
+        <p:spPr>
+          <a:xfrm>
+            <a:off x="1371600" y="3840480"/>
+            <a:ext cx="2743200" cy="45720"/>
+          </a:xfrm>
+          <a:prstGeom prst="rect">
+            <a:avLst/>
+          </a:prstGeom>
+          <a:solidFill>
+            <a:srgbClr val="007EE5"/>
+          </a:solidFill>
+          <a:ln>
+            <a:noFill/>
+          </a:ln>
+        </p:spPr>
+        <p:style>
+          <a:lnRef idx="1">
+            <a:schemeClr val="accent1"/>
+          </a:lnRef>
+          <a:fillRef idx="3">
+            <a:schemeClr val="accent1"/>
+          </a:fillRef>
+          <a:effectRef idx="2">
+            <a:schemeClr val="accent1"/>
+          </a:effectRef>
+          <a:fontRef idx="minor">
+            <a:schemeClr val="lt1"/>
+          </a:fontRef>
+        </p:style>
+        <p:txBody>
+          <a:bodyPr rtlCol="0" anchor="ctr"/>
+          <a:lstStyle/>
+          <a:p>
+            <a:pPr algn="ctr"/>
+          </a:p>
+        </p:txBody>
+      </p:sp>
+      <p:sp>
+        <p:nvSpPr>
+          <p:cNvPr id="4" name="TextBox 3"/>
           <p:cNvSpPr txBox="1"/>
           <p:nvPr/>
         </p:nvSpPr>
         <p:spPr>
           <a:xfrm>
-            <a:off x="457200" y="365760"/>
-            <a:ext cx="11247120" cy="822960"/>
+            <a:off x="1371600" y="2286000"/>
+            <a:ext cx="9144000" cy="1371600"/>
           </a:xfrm>
           <a:prstGeom prst="rect">
             <a:avLst/>
@@ -3992,18 +6535,25 @@
           <a:noFill/>
         </p:spPr>
         <p:txBody>
-          <a:bodyPr wrap="none">
-            <a:spAutoFit/>
-          </a:bodyPr>
-          <a:lstStyle/>
-          <a:p>
-            <a:r>
-              <a:rPr sz="2400" b="1">
+          <a:bodyPr wrap="square"/>
+          <a:lstStyle/>
+          <a:p>
+            <a:pPr algn="l">
+              <a:spcBef>
+                <a:spcPts val="0"/>
+              </a:spcBef>
+              <a:spcAft>
+                <a:spcPts val="0"/>
+              </a:spcAft>
+            </a:pPr>
+            <a:r>
+              <a:rPr sz="3200" b="1">
                 <a:solidFill>
-                  <a:srgbClr val="0B3D91"/>
+                  <a:srgbClr val="FFFFFF"/>
                 </a:solidFill>
+                <a:latin typeface="Calibri"/>
               </a:rPr>
-              <a:t>[6/22] Section 2</a:t>
+              <a:t>Section 2</a:t>
             </a:r>
           </a:p>
         </p:txBody>
@@ -4028,14 +6578,100 @@
       <p:grpSpPr/>
       <p:sp>
         <p:nvSpPr>
-          <p:cNvPr id="2" name="TextBox 1"/>
+          <p:cNvPr id="2" name="Rectangle 1"/>
+          <p:cNvSpPr/>
+          <p:nvPr/>
+        </p:nvSpPr>
+        <p:spPr>
+          <a:xfrm>
+            <a:off x="0" y="0"/>
+            <a:ext cx="12191695" cy="6858000"/>
+          </a:xfrm>
+          <a:prstGeom prst="rect">
+            <a:avLst/>
+          </a:prstGeom>
+          <a:solidFill>
+            <a:srgbClr val="002B5C"/>
+          </a:solidFill>
+          <a:ln>
+            <a:noFill/>
+          </a:ln>
+        </p:spPr>
+        <p:style>
+          <a:lnRef idx="1">
+            <a:schemeClr val="accent1"/>
+          </a:lnRef>
+          <a:fillRef idx="3">
+            <a:schemeClr val="accent1"/>
+          </a:fillRef>
+          <a:effectRef idx="2">
+            <a:schemeClr val="accent1"/>
+          </a:effectRef>
+          <a:fontRef idx="minor">
+            <a:schemeClr val="lt1"/>
+          </a:fontRef>
+        </p:style>
+        <p:txBody>
+          <a:bodyPr rtlCol="0" anchor="ctr"/>
+          <a:lstStyle/>
+          <a:p>
+            <a:pPr algn="ctr"/>
+          </a:p>
+        </p:txBody>
+      </p:sp>
+      <p:sp>
+        <p:nvSpPr>
+          <p:cNvPr id="3" name="Rectangle 2"/>
+          <p:cNvSpPr/>
+          <p:nvPr/>
+        </p:nvSpPr>
+        <p:spPr>
+          <a:xfrm>
+            <a:off x="1371600" y="3840480"/>
+            <a:ext cx="2743200" cy="45720"/>
+          </a:xfrm>
+          <a:prstGeom prst="rect">
+            <a:avLst/>
+          </a:prstGeom>
+          <a:solidFill>
+            <a:srgbClr val="007EE5"/>
+          </a:solidFill>
+          <a:ln>
+            <a:noFill/>
+          </a:ln>
+        </p:spPr>
+        <p:style>
+          <a:lnRef idx="1">
+            <a:schemeClr val="accent1"/>
+          </a:lnRef>
+          <a:fillRef idx="3">
+            <a:schemeClr val="accent1"/>
+          </a:fillRef>
+          <a:effectRef idx="2">
+            <a:schemeClr val="accent1"/>
+          </a:effectRef>
+          <a:fontRef idx="minor">
+            <a:schemeClr val="lt1"/>
+          </a:fontRef>
+        </p:style>
+        <p:txBody>
+          <a:bodyPr rtlCol="0" anchor="ctr"/>
+          <a:lstStyle/>
+          <a:p>
+            <a:pPr algn="ctr"/>
+          </a:p>
+        </p:txBody>
+      </p:sp>
+      <p:sp>
+        <p:nvSpPr>
+          <p:cNvPr id="4" name="TextBox 3"/>
           <p:cNvSpPr txBox="1"/>
           <p:nvPr/>
         </p:nvSpPr>
         <p:spPr>
           <a:xfrm>
-            <a:off x="457200" y="365760"/>
-            <a:ext cx="11247120" cy="822960"/>
+            <a:off x="1371600" y="2286000"/>
+            <a:ext cx="9144000" cy="1371600"/>
           </a:xfrm>
           <a:prstGeom prst="rect">
             <a:avLst/>
@@ -4043,18 +6679,25 @@
           <a:noFill/>
         </p:spPr>
         <p:txBody>
-          <a:bodyPr wrap="none">
-            <a:spAutoFit/>
-          </a:bodyPr>
-          <a:lstStyle/>
-          <a:p>
-            <a:r>
-              <a:rPr sz="2400" b="1">
+          <a:bodyPr wrap="square"/>
+          <a:lstStyle/>
+          <a:p>
+            <a:pPr algn="l">
+              <a:spcBef>
+                <a:spcPts val="0"/>
+              </a:spcBef>
+              <a:spcAft>
+                <a:spcPts val="0"/>
+              </a:spcAft>
+            </a:pPr>
+            <a:r>
+              <a:rPr sz="3200" b="1">
                 <a:solidFill>
-                  <a:srgbClr val="0B3D91"/>
+                  <a:srgbClr val="FFFFFF"/>
                 </a:solidFill>
+                <a:latin typeface="Calibri"/>
               </a:rPr>
-              <a:t>[7/22] Section 3</a:t>
+              <a:t>Section 3</a:t>
             </a:r>
           </a:p>
         </p:txBody>
@@ -4079,14 +6722,100 @@
       <p:grpSpPr/>
       <p:sp>
         <p:nvSpPr>
-          <p:cNvPr id="2" name="TextBox 1"/>
+          <p:cNvPr id="2" name="Rectangle 1"/>
+          <p:cNvSpPr/>
+          <p:nvPr/>
+        </p:nvSpPr>
+        <p:spPr>
+          <a:xfrm>
+            <a:off x="0" y="0"/>
+            <a:ext cx="12191695" cy="6858000"/>
+          </a:xfrm>
+          <a:prstGeom prst="rect">
+            <a:avLst/>
+          </a:prstGeom>
+          <a:solidFill>
+            <a:srgbClr val="002B5C"/>
+          </a:solidFill>
+          <a:ln>
+            <a:noFill/>
+          </a:ln>
+        </p:spPr>
+        <p:style>
+          <a:lnRef idx="1">
+            <a:schemeClr val="accent1"/>
+          </a:lnRef>
+          <a:fillRef idx="3">
+            <a:schemeClr val="accent1"/>
+          </a:fillRef>
+          <a:effectRef idx="2">
+            <a:schemeClr val="accent1"/>
+          </a:effectRef>
+          <a:fontRef idx="minor">
+            <a:schemeClr val="lt1"/>
+          </a:fontRef>
+        </p:style>
+        <p:txBody>
+          <a:bodyPr rtlCol="0" anchor="ctr"/>
+          <a:lstStyle/>
+          <a:p>
+            <a:pPr algn="ctr"/>
+          </a:p>
+        </p:txBody>
+      </p:sp>
+      <p:sp>
+        <p:nvSpPr>
+          <p:cNvPr id="3" name="Rectangle 2"/>
+          <p:cNvSpPr/>
+          <p:nvPr/>
+        </p:nvSpPr>
+        <p:spPr>
+          <a:xfrm>
+            <a:off x="1371600" y="3840480"/>
+            <a:ext cx="2743200" cy="45720"/>
+          </a:xfrm>
+          <a:prstGeom prst="rect">
+            <a:avLst/>
+          </a:prstGeom>
+          <a:solidFill>
+            <a:srgbClr val="007EE5"/>
+          </a:solidFill>
+          <a:ln>
+            <a:noFill/>
+          </a:ln>
+        </p:spPr>
+        <p:style>
+          <a:lnRef idx="1">
+            <a:schemeClr val="accent1"/>
+          </a:lnRef>
+          <a:fillRef idx="3">
+            <a:schemeClr val="accent1"/>
+          </a:fillRef>
+          <a:effectRef idx="2">
+            <a:schemeClr val="accent1"/>
+          </a:effectRef>
+          <a:fontRef idx="minor">
+            <a:schemeClr val="lt1"/>
+          </a:fontRef>
+        </p:style>
+        <p:txBody>
+          <a:bodyPr rtlCol="0" anchor="ctr"/>
+          <a:lstStyle/>
+          <a:p>
+            <a:pPr algn="ctr"/>
+          </a:p>
+        </p:txBody>
+      </p:sp>
+      <p:sp>
+        <p:nvSpPr>
+          <p:cNvPr id="4" name="TextBox 3"/>
           <p:cNvSpPr txBox="1"/>
           <p:nvPr/>
         </p:nvSpPr>
         <p:spPr>
           <a:xfrm>
-            <a:off x="457200" y="365760"/>
-            <a:ext cx="11247120" cy="822960"/>
+            <a:off x="1371600" y="2286000"/>
+            <a:ext cx="9144000" cy="1371600"/>
           </a:xfrm>
           <a:prstGeom prst="rect">
             <a:avLst/>
@@ -4094,18 +6823,25 @@
           <a:noFill/>
         </p:spPr>
         <p:txBody>
-          <a:bodyPr wrap="none">
-            <a:spAutoFit/>
-          </a:bodyPr>
-          <a:lstStyle/>
-          <a:p>
-            <a:r>
-              <a:rPr sz="2400" b="1">
+          <a:bodyPr wrap="square"/>
+          <a:lstStyle/>
+          <a:p>
+            <a:pPr algn="l">
+              <a:spcBef>
+                <a:spcPts val="0"/>
+              </a:spcBef>
+              <a:spcAft>
+                <a:spcPts val="0"/>
+              </a:spcAft>
+            </a:pPr>
+            <a:r>
+              <a:rPr sz="3200" b="1">
                 <a:solidFill>
-                  <a:srgbClr val="0B3D91"/>
+                  <a:srgbClr val="FFFFFF"/>
                 </a:solidFill>
+                <a:latin typeface="Calibri"/>
               </a:rPr>
-              <a:t>[8/22] Section 4</a:t>
+              <a:t>Section 4</a:t>
             </a:r>
           </a:p>
         </p:txBody>
@@ -4130,14 +6866,100 @@
       <p:grpSpPr/>
       <p:sp>
         <p:nvSpPr>
-          <p:cNvPr id="2" name="TextBox 1"/>
+          <p:cNvPr id="2" name="Rectangle 1"/>
+          <p:cNvSpPr/>
+          <p:nvPr/>
+        </p:nvSpPr>
+        <p:spPr>
+          <a:xfrm>
+            <a:off x="0" y="0"/>
+            <a:ext cx="12191695" cy="6858000"/>
+          </a:xfrm>
+          <a:prstGeom prst="rect">
+            <a:avLst/>
+          </a:prstGeom>
+          <a:solidFill>
+            <a:srgbClr val="002B5C"/>
+          </a:solidFill>
+          <a:ln>
+            <a:noFill/>
+          </a:ln>
+        </p:spPr>
+        <p:style>
+          <a:lnRef idx="1">
+            <a:schemeClr val="accent1"/>
+          </a:lnRef>
+          <a:fillRef idx="3">
+            <a:schemeClr val="accent1"/>
+          </a:fillRef>
+          <a:effectRef idx="2">
+            <a:schemeClr val="accent1"/>
+          </a:effectRef>
+          <a:fontRef idx="minor">
+            <a:schemeClr val="lt1"/>
+          </a:fontRef>
+        </p:style>
+        <p:txBody>
+          <a:bodyPr rtlCol="0" anchor="ctr"/>
+          <a:lstStyle/>
+          <a:p>
+            <a:pPr algn="ctr"/>
+          </a:p>
+        </p:txBody>
+      </p:sp>
+      <p:sp>
+        <p:nvSpPr>
+          <p:cNvPr id="3" name="Rectangle 2"/>
+          <p:cNvSpPr/>
+          <p:nvPr/>
+        </p:nvSpPr>
+        <p:spPr>
+          <a:xfrm>
+            <a:off x="1371600" y="3840480"/>
+            <a:ext cx="2743200" cy="45720"/>
+          </a:xfrm>
+          <a:prstGeom prst="rect">
+            <a:avLst/>
+          </a:prstGeom>
+          <a:solidFill>
+            <a:srgbClr val="007EE5"/>
+          </a:solidFill>
+          <a:ln>
+            <a:noFill/>
+          </a:ln>
+        </p:spPr>
+        <p:style>
+          <a:lnRef idx="1">
+            <a:schemeClr val="accent1"/>
+          </a:lnRef>
+          <a:fillRef idx="3">
+            <a:schemeClr val="accent1"/>
+          </a:fillRef>
+          <a:effectRef idx="2">
+            <a:schemeClr val="accent1"/>
+          </a:effectRef>
+          <a:fontRef idx="minor">
+            <a:schemeClr val="lt1"/>
+          </a:fontRef>
+        </p:style>
+        <p:txBody>
+          <a:bodyPr rtlCol="0" anchor="ctr"/>
+          <a:lstStyle/>
+          <a:p>
+            <a:pPr algn="ctr"/>
+          </a:p>
+        </p:txBody>
+      </p:sp>
+      <p:sp>
+        <p:nvSpPr>
+          <p:cNvPr id="4" name="TextBox 3"/>
           <p:cNvSpPr txBox="1"/>
           <p:nvPr/>
         </p:nvSpPr>
         <p:spPr>
           <a:xfrm>
-            <a:off x="457200" y="365760"/>
-            <a:ext cx="11247120" cy="822960"/>
+            <a:off x="1371600" y="2286000"/>
+            <a:ext cx="9144000" cy="1371600"/>
           </a:xfrm>
           <a:prstGeom prst="rect">
             <a:avLst/>
@@ -4145,18 +6967,25 @@
           <a:noFill/>
         </p:spPr>
         <p:txBody>
-          <a:bodyPr wrap="none">
-            <a:spAutoFit/>
-          </a:bodyPr>
-          <a:lstStyle/>
-          <a:p>
-            <a:r>
-              <a:rPr sz="2400" b="1">
+          <a:bodyPr wrap="square"/>
+          <a:lstStyle/>
+          <a:p>
+            <a:pPr algn="l">
+              <a:spcBef>
+                <a:spcPts val="0"/>
+              </a:spcBef>
+              <a:spcAft>
+                <a:spcPts val="0"/>
+              </a:spcAft>
+            </a:pPr>
+            <a:r>
+              <a:rPr sz="3200" b="1">
                 <a:solidFill>
-                  <a:srgbClr val="0B3D91"/>
+                  <a:srgbClr val="FFFFFF"/>
                 </a:solidFill>
+                <a:latin typeface="Calibri"/>
               </a:rPr>
-              <a:t>[9/22] Section 5</a:t>
+              <a:t>Section 5</a:t>
             </a:r>
           </a:p>
         </p:txBody>
